--- a/public/lessons/year-6-maths/autumn/week-4/use-long-division-with-exact-answers/teaching-powerpoint-v1.pptx
+++ b/public/lessons/year-6-maths/autumn/week-4/use-long-division-with-exact-answers/teaching-powerpoint-v1.pptx
@@ -2,24 +2,24 @@
 <file path=ppt/presentation.xml><?xml version="1.0" encoding="utf-8"?>
 <p:presentation xmlns:p="http://schemas.openxmlformats.org/presentationml/2006/main">
   <p:sldMasterIdLst>
-    <p:sldMasterId xmlns:r="http://schemas.openxmlformats.org/officeDocument/2006/relationships" id="2147483648" r:id="R0b18cd110e984b1e"/>
+    <p:sldMasterId xmlns:r="http://schemas.openxmlformats.org/officeDocument/2006/relationships" id="2147483648" r:id="Rc419db68f69d49b5"/>
   </p:sldMasterIdLst>
   <p:notesMasterIdLst>
-    <p:notesMasterId xmlns:r="http://schemas.openxmlformats.org/officeDocument/2006/relationships" r:id="R988726e0e0814d65"/>
+    <p:notesMasterId xmlns:r="http://schemas.openxmlformats.org/officeDocument/2006/relationships" r:id="R2d83510990674fe0"/>
   </p:notesMasterIdLst>
   <p:sldIdLst>
-    <p:sldId xmlns:r="http://schemas.openxmlformats.org/officeDocument/2006/relationships" id="256" r:id="R4b258df1d69d4e8f"/>
-    <p:sldId xmlns:r="http://schemas.openxmlformats.org/officeDocument/2006/relationships" id="257" r:id="R83507d3ddc334102"/>
-    <p:sldId xmlns:r="http://schemas.openxmlformats.org/officeDocument/2006/relationships" id="258" r:id="R23db4d0379c64e69"/>
-    <p:sldId xmlns:r="http://schemas.openxmlformats.org/officeDocument/2006/relationships" id="259" r:id="Rb9b6ab6bfffe4dab"/>
-    <p:sldId xmlns:r="http://schemas.openxmlformats.org/officeDocument/2006/relationships" id="260" r:id="R8d82592285fe46a3"/>
-    <p:sldId xmlns:r="http://schemas.openxmlformats.org/officeDocument/2006/relationships" id="261" r:id="R8159405901574171"/>
-    <p:sldId xmlns:r="http://schemas.openxmlformats.org/officeDocument/2006/relationships" id="262" r:id="Rf147e69087664f38"/>
-    <p:sldId xmlns:r="http://schemas.openxmlformats.org/officeDocument/2006/relationships" id="263" r:id="R7c12118e7c4148c5"/>
-    <p:sldId xmlns:r="http://schemas.openxmlformats.org/officeDocument/2006/relationships" id="264" r:id="R8719a3036f8648d9"/>
-    <p:sldId xmlns:r="http://schemas.openxmlformats.org/officeDocument/2006/relationships" id="265" r:id="Rac45dd689e5f49c1"/>
-    <p:sldId xmlns:r="http://schemas.openxmlformats.org/officeDocument/2006/relationships" id="266" r:id="R8b346157fc2a4765"/>
-    <p:sldId xmlns:r="http://schemas.openxmlformats.org/officeDocument/2006/relationships" id="267" r:id="R672f8ee918a641aa"/>
+    <p:sldId xmlns:r="http://schemas.openxmlformats.org/officeDocument/2006/relationships" id="256" r:id="Ra9bbe644310d4fc1"/>
+    <p:sldId xmlns:r="http://schemas.openxmlformats.org/officeDocument/2006/relationships" id="257" r:id="R4561698038f94492"/>
+    <p:sldId xmlns:r="http://schemas.openxmlformats.org/officeDocument/2006/relationships" id="258" r:id="R8b9f4cb2594f457a"/>
+    <p:sldId xmlns:r="http://schemas.openxmlformats.org/officeDocument/2006/relationships" id="259" r:id="R0b4c0ea8dc3444e8"/>
+    <p:sldId xmlns:r="http://schemas.openxmlformats.org/officeDocument/2006/relationships" id="260" r:id="R441644ad26274a10"/>
+    <p:sldId xmlns:r="http://schemas.openxmlformats.org/officeDocument/2006/relationships" id="261" r:id="Ree6bf12af05a4c5c"/>
+    <p:sldId xmlns:r="http://schemas.openxmlformats.org/officeDocument/2006/relationships" id="262" r:id="R96ac352a0998433b"/>
+    <p:sldId xmlns:r="http://schemas.openxmlformats.org/officeDocument/2006/relationships" id="263" r:id="Ra3563897f4e84915"/>
+    <p:sldId xmlns:r="http://schemas.openxmlformats.org/officeDocument/2006/relationships" id="264" r:id="Rc4a9d05c685c4310"/>
+    <p:sldId xmlns:r="http://schemas.openxmlformats.org/officeDocument/2006/relationships" id="265" r:id="R85b10607feeb4a19"/>
+    <p:sldId xmlns:r="http://schemas.openxmlformats.org/officeDocument/2006/relationships" id="266" r:id="R88dd81988bbf4eb3"/>
+    <p:sldId xmlns:r="http://schemas.openxmlformats.org/officeDocument/2006/relationships" id="267" r:id="Rc6a8c98c02db4944"/>
   </p:sldIdLst>
   <p:sldSz cx="12192000" cy="6858000"/>
   <p:notesSz cx="6858000" cy="9144000"/>
@@ -873,7 +873,7 @@
           <a:lstStyle xmlns:a="http://schemas.openxmlformats.org/drawingml/2006/main"/>
           <a:p xmlns:a="http://schemas.openxmlformats.org/drawingml/2006/main">
             <a:r>
-              <a:t>I do. Reveal the question, setup and each calculation stage one click at a time. Pupils watch before copying. Model answer: 364.</a:t>
+              <a:t>I do. Reveal the question, then reveal each mathematical change one click at a time. Point to the numbers and operation that changed before moving to the next line. Final answer: 364.</a:t>
             </a:r>
           </a:p>
         </p:txBody>
@@ -1291,7 +1291,7 @@
   </p:cSld>
   <p:clrMap bg1="lt1" tx1="dk1" bg2="lt2" tx2="dk2" accent1="accent1" accent2="accent2" accent3="accent3" accent4="accent4" accent5="accent5" accent6="accent6" hlink="hlink" folHlink="folHlink"/>
   <p:sldLayoutIdLst>
-    <p:sldLayoutId xmlns:r="http://schemas.openxmlformats.org/officeDocument/2006/relationships" id="2147483649" r:id="R875c34e37bf64581"/>
+    <p:sldLayoutId xmlns:r="http://schemas.openxmlformats.org/officeDocument/2006/relationships" id="2147483649" r:id="R6aba41a127dd4c5c"/>
   </p:sldLayoutIdLst>
   <p:txStyles>
     <p:titleStyle>
@@ -1842,7 +1842,7 @@
           <p:cNvPr id="12" name="">
             <a:extLst xmlns:a="http://schemas.openxmlformats.org/drawingml/2006/main">
               <a:ext uri="{FF2B5EF4-FFF2-40B4-BE49-F238E27FC236}">
-                <a16:creationId xmlns:a16="http://schemas.microsoft.com/office/drawing/2014/main" id="{55BCB693-042B-476B-BF0C-454E2854BAB6}"/>
+                <a16:creationId xmlns:a16="http://schemas.microsoft.com/office/drawing/2014/main" id="{7A771AAB-D05F-45CF-95E5-F7C4291697E5}"/>
               </a:ext>
             </a:extLst>
           </p:cNvPr>
@@ -1874,7 +1874,7 @@
           <p:cNvPr id="2" name="">
             <a:extLst xmlns:a="http://schemas.openxmlformats.org/drawingml/2006/main">
               <a:ext uri="{FF2B5EF4-FFF2-40B4-BE49-F238E27FC236}">
-                <a16:creationId xmlns:a16="http://schemas.microsoft.com/office/drawing/2014/main" id="{63B38380-D1EC-480E-B8AE-9CC28B1D1719}"/>
+                <a16:creationId xmlns:a16="http://schemas.microsoft.com/office/drawing/2014/main" id="{8B8D57E4-65BD-490A-BE8B-10E86444B29A}"/>
               </a:ext>
             </a:extLst>
           </p:cNvPr>
@@ -1931,7 +1931,7 @@
           <p:cNvPr id="3" name="">
             <a:extLst xmlns:a="http://schemas.openxmlformats.org/drawingml/2006/main">
               <a:ext uri="{FF2B5EF4-FFF2-40B4-BE49-F238E27FC236}">
-                <a16:creationId xmlns:a16="http://schemas.microsoft.com/office/drawing/2014/main" id="{83D145FA-34EC-48D8-A176-FAC4F2D1078F}"/>
+                <a16:creationId xmlns:a16="http://schemas.microsoft.com/office/drawing/2014/main" id="{86517B70-6EEA-4DD3-821A-5E838F2C7FB8}"/>
               </a:ext>
             </a:extLst>
           </p:cNvPr>
@@ -1965,7 +1965,7 @@
           <p:cNvPr id="4" name="">
             <a:extLst xmlns:a="http://schemas.openxmlformats.org/drawingml/2006/main">
               <a:ext uri="{FF2B5EF4-FFF2-40B4-BE49-F238E27FC236}">
-                <a16:creationId xmlns:a16="http://schemas.microsoft.com/office/drawing/2014/main" id="{D0DD7CB5-FBF8-4E03-A8B5-856E2EDDBA56}"/>
+                <a16:creationId xmlns:a16="http://schemas.microsoft.com/office/drawing/2014/main" id="{EAFF8DE5-314D-488E-B543-C002CA9D3F52}"/>
               </a:ext>
             </a:extLst>
           </p:cNvPr>
@@ -2022,7 +2022,7 @@
           <p:cNvPr id="5" name="">
             <a:extLst xmlns:a="http://schemas.openxmlformats.org/drawingml/2006/main">
               <a:ext uri="{FF2B5EF4-FFF2-40B4-BE49-F238E27FC236}">
-                <a16:creationId xmlns:a16="http://schemas.microsoft.com/office/drawing/2014/main" id="{ECB251B5-BC1B-40C5-8EC0-6A4AF0A5ECE0}"/>
+                <a16:creationId xmlns:a16="http://schemas.microsoft.com/office/drawing/2014/main" id="{7ECA3581-888A-4F33-9A1E-5DAF634CD739}"/>
               </a:ext>
             </a:extLst>
           </p:cNvPr>
@@ -2079,7 +2079,7 @@
           <p:cNvPr id="6" name="">
             <a:extLst xmlns:a="http://schemas.openxmlformats.org/drawingml/2006/main">
               <a:ext uri="{FF2B5EF4-FFF2-40B4-BE49-F238E27FC236}">
-                <a16:creationId xmlns:a16="http://schemas.microsoft.com/office/drawing/2014/main" id="{2878B9A7-2342-4A05-839D-83FD7CFEEF57}"/>
+                <a16:creationId xmlns:a16="http://schemas.microsoft.com/office/drawing/2014/main" id="{E5B9DE14-BE2F-4DA6-ADCD-3D1D81E016C1}"/>
               </a:ext>
             </a:extLst>
           </p:cNvPr>
@@ -2113,7 +2113,7 @@
           <p:cNvPr id="7" name="">
             <a:extLst xmlns:a="http://schemas.openxmlformats.org/drawingml/2006/main">
               <a:ext uri="{FF2B5EF4-FFF2-40B4-BE49-F238E27FC236}">
-                <a16:creationId xmlns:a16="http://schemas.microsoft.com/office/drawing/2014/main" id="{094B774F-5692-4B6C-9480-79A9AF6D7563}"/>
+                <a16:creationId xmlns:a16="http://schemas.microsoft.com/office/drawing/2014/main" id="{F068BC04-94B9-40C7-9FA8-8FB3320F9C15}"/>
               </a:ext>
             </a:extLst>
           </p:cNvPr>
@@ -2170,7 +2170,7 @@
           <p:cNvPr id="8" name="">
             <a:extLst xmlns:a="http://schemas.openxmlformats.org/drawingml/2006/main">
               <a:ext uri="{FF2B5EF4-FFF2-40B4-BE49-F238E27FC236}">
-                <a16:creationId xmlns:a16="http://schemas.microsoft.com/office/drawing/2014/main" id="{6CC80E53-51BD-4E98-AE37-7A617ADB75C4}"/>
+                <a16:creationId xmlns:a16="http://schemas.microsoft.com/office/drawing/2014/main" id="{846CBB38-E806-468F-9763-551EB216BCA9}"/>
               </a:ext>
             </a:extLst>
           </p:cNvPr>
@@ -2227,7 +2227,7 @@
           <p:cNvPr id="9" name="">
             <a:extLst xmlns:a="http://schemas.openxmlformats.org/drawingml/2006/main">
               <a:ext uri="{FF2B5EF4-FFF2-40B4-BE49-F238E27FC236}">
-                <a16:creationId xmlns:a16="http://schemas.microsoft.com/office/drawing/2014/main" id="{53BA1B1D-4DA6-4DED-96BA-193C29D3FFC4}"/>
+                <a16:creationId xmlns:a16="http://schemas.microsoft.com/office/drawing/2014/main" id="{BD92321B-0A9C-4C95-8093-EF26E1870BD5}"/>
               </a:ext>
             </a:extLst>
           </p:cNvPr>
@@ -2284,7 +2284,7 @@
           <p:cNvPr id="10" name="">
             <a:extLst xmlns:a="http://schemas.openxmlformats.org/drawingml/2006/main">
               <a:ext uri="{FF2B5EF4-FFF2-40B4-BE49-F238E27FC236}">
-                <a16:creationId xmlns:a16="http://schemas.microsoft.com/office/drawing/2014/main" id="{D0F6A0F7-4BC9-42FD-8E6E-4DB25250E789}"/>
+                <a16:creationId xmlns:a16="http://schemas.microsoft.com/office/drawing/2014/main" id="{7CF57460-A5EB-42E1-ACB3-3851C131EE90}"/>
               </a:ext>
             </a:extLst>
           </p:cNvPr>
@@ -2341,7 +2341,7 @@
           <p:cNvPr id="11" name="">
             <a:extLst xmlns:a="http://schemas.openxmlformats.org/drawingml/2006/main">
               <a:ext uri="{FF2B5EF4-FFF2-40B4-BE49-F238E27FC236}">
-                <a16:creationId xmlns:a16="http://schemas.microsoft.com/office/drawing/2014/main" id="{CD7EBAD0-CF65-45C7-9E31-A6CFF3B8F1A3}"/>
+                <a16:creationId xmlns:a16="http://schemas.microsoft.com/office/drawing/2014/main" id="{55643963-3ED2-49C1-9D7C-B727E1E7ED0F}"/>
               </a:ext>
             </a:extLst>
           </p:cNvPr>
@@ -2396,7 +2396,7 @@
     </p:spTree>
     <p:extLst>
       <p:ext uri="{BB962C8B-B14F-4D97-AF65-F5344CB8AC3E}">
-        <p14:creationId xmlns:p14="http://schemas.microsoft.com/office/powerpoint/2010/main" val="2042703772"/>
+        <p14:creationId xmlns:p14="http://schemas.microsoft.com/office/powerpoint/2010/main" val="786429714"/>
       </p:ext>
     </p:extLst>
   </p:cSld>
@@ -2427,7 +2427,7 @@
           <p:cNvPr id="14" name="">
             <a:extLst xmlns:a="http://schemas.openxmlformats.org/drawingml/2006/main">
               <a:ext uri="{FF2B5EF4-FFF2-40B4-BE49-F238E27FC236}">
-                <a16:creationId xmlns:a16="http://schemas.microsoft.com/office/drawing/2014/main" id="{62B7B229-381E-465E-871B-3708BF90428E}"/>
+                <a16:creationId xmlns:a16="http://schemas.microsoft.com/office/drawing/2014/main" id="{08FB66E1-6685-497A-A891-0511DD06D79E}"/>
               </a:ext>
             </a:extLst>
           </p:cNvPr>
@@ -2459,7 +2459,7 @@
           <p:cNvPr id="2" name="">
             <a:extLst xmlns:a="http://schemas.openxmlformats.org/drawingml/2006/main">
               <a:ext uri="{FF2B5EF4-FFF2-40B4-BE49-F238E27FC236}">
-                <a16:creationId xmlns:a16="http://schemas.microsoft.com/office/drawing/2014/main" id="{F00FBEB4-E37F-4450-91AE-178AA39A16BD}"/>
+                <a16:creationId xmlns:a16="http://schemas.microsoft.com/office/drawing/2014/main" id="{25B32D0A-9154-463F-AF79-FF922F12AD66}"/>
               </a:ext>
             </a:extLst>
           </p:cNvPr>
@@ -2516,7 +2516,7 @@
           <p:cNvPr id="3" name="">
             <a:extLst xmlns:a="http://schemas.openxmlformats.org/drawingml/2006/main">
               <a:ext uri="{FF2B5EF4-FFF2-40B4-BE49-F238E27FC236}">
-                <a16:creationId xmlns:a16="http://schemas.microsoft.com/office/drawing/2014/main" id="{3FFCD35F-D1F3-4055-97DD-41E1013A943C}"/>
+                <a16:creationId xmlns:a16="http://schemas.microsoft.com/office/drawing/2014/main" id="{9945CFF5-0B80-46E6-8C25-AAC1A06FA155}"/>
               </a:ext>
             </a:extLst>
           </p:cNvPr>
@@ -2548,7 +2548,7 @@
           <p:cNvPr id="4" name="">
             <a:extLst xmlns:a="http://schemas.openxmlformats.org/drawingml/2006/main">
               <a:ext uri="{FF2B5EF4-FFF2-40B4-BE49-F238E27FC236}">
-                <a16:creationId xmlns:a16="http://schemas.microsoft.com/office/drawing/2014/main" id="{188FF249-2549-4B32-B546-F78DFFFE6D88}"/>
+                <a16:creationId xmlns:a16="http://schemas.microsoft.com/office/drawing/2014/main" id="{9850F86B-A5C8-45EC-9E7A-48571E13CDBB}"/>
               </a:ext>
             </a:extLst>
           </p:cNvPr>
@@ -2605,7 +2605,7 @@
           <p:cNvPr id="5" name="">
             <a:extLst xmlns:a="http://schemas.openxmlformats.org/drawingml/2006/main">
               <a:ext uri="{FF2B5EF4-FFF2-40B4-BE49-F238E27FC236}">
-                <a16:creationId xmlns:a16="http://schemas.microsoft.com/office/drawing/2014/main" id="{A6EDA5D2-FBD1-45C3-882D-B1720220D35A}"/>
+                <a16:creationId xmlns:a16="http://schemas.microsoft.com/office/drawing/2014/main" id="{B0A973EF-76C6-4188-AD96-7A91A9681085}"/>
               </a:ext>
             </a:extLst>
           </p:cNvPr>
@@ -2662,7 +2662,7 @@
           <p:cNvPr id="6" name="">
             <a:extLst xmlns:a="http://schemas.openxmlformats.org/drawingml/2006/main">
               <a:ext uri="{FF2B5EF4-FFF2-40B4-BE49-F238E27FC236}">
-                <a16:creationId xmlns:a16="http://schemas.microsoft.com/office/drawing/2014/main" id="{AFFAB048-5524-41A1-A33C-12DC9C8E022D}"/>
+                <a16:creationId xmlns:a16="http://schemas.microsoft.com/office/drawing/2014/main" id="{F2BFEEB4-4024-411D-ABF5-ECECC6B0736A}"/>
               </a:ext>
             </a:extLst>
           </p:cNvPr>
@@ -2719,7 +2719,7 @@
           <p:cNvPr id="7" name="">
             <a:extLst xmlns:a="http://schemas.openxmlformats.org/drawingml/2006/main">
               <a:ext uri="{FF2B5EF4-FFF2-40B4-BE49-F238E27FC236}">
-                <a16:creationId xmlns:a16="http://schemas.microsoft.com/office/drawing/2014/main" id="{992B0B9C-F671-4277-AD62-2D3874E008AC}"/>
+                <a16:creationId xmlns:a16="http://schemas.microsoft.com/office/drawing/2014/main" id="{8473DECF-4ABD-41AE-8A26-6AD7826D5CDB}"/>
               </a:ext>
             </a:extLst>
           </p:cNvPr>
@@ -2751,7 +2751,7 @@
           <p:cNvPr id="8" name="">
             <a:extLst xmlns:a="http://schemas.openxmlformats.org/drawingml/2006/main">
               <a:ext uri="{FF2B5EF4-FFF2-40B4-BE49-F238E27FC236}">
-                <a16:creationId xmlns:a16="http://schemas.microsoft.com/office/drawing/2014/main" id="{C0EBD685-9F65-4E3D-8DFC-F034FA615F45}"/>
+                <a16:creationId xmlns:a16="http://schemas.microsoft.com/office/drawing/2014/main" id="{E28C9A1A-5AF6-4C0E-936E-70481F874EFE}"/>
               </a:ext>
             </a:extLst>
           </p:cNvPr>
@@ -2808,7 +2808,7 @@
           <p:cNvPr id="9" name="">
             <a:extLst xmlns:a="http://schemas.openxmlformats.org/drawingml/2006/main">
               <a:ext uri="{FF2B5EF4-FFF2-40B4-BE49-F238E27FC236}">
-                <a16:creationId xmlns:a16="http://schemas.microsoft.com/office/drawing/2014/main" id="{E363E11E-949D-442E-97A9-1209F9F84C6F}"/>
+                <a16:creationId xmlns:a16="http://schemas.microsoft.com/office/drawing/2014/main" id="{97973FED-480B-43B2-8D83-6F4895A07F5A}"/>
               </a:ext>
             </a:extLst>
           </p:cNvPr>
@@ -2865,7 +2865,7 @@
           <p:cNvPr id="10" name="">
             <a:extLst xmlns:a="http://schemas.openxmlformats.org/drawingml/2006/main">
               <a:ext uri="{FF2B5EF4-FFF2-40B4-BE49-F238E27FC236}">
-                <a16:creationId xmlns:a16="http://schemas.microsoft.com/office/drawing/2014/main" id="{585F8A6B-8C7A-4B32-9871-9E782EBBF19C}"/>
+                <a16:creationId xmlns:a16="http://schemas.microsoft.com/office/drawing/2014/main" id="{4F0CC46F-8164-4EA0-AB85-7B6E093123FD}"/>
               </a:ext>
             </a:extLst>
           </p:cNvPr>
@@ -2922,7 +2922,7 @@
           <p:cNvPr id="11" name="">
             <a:extLst xmlns:a="http://schemas.openxmlformats.org/drawingml/2006/main">
               <a:ext uri="{FF2B5EF4-FFF2-40B4-BE49-F238E27FC236}">
-                <a16:creationId xmlns:a16="http://schemas.microsoft.com/office/drawing/2014/main" id="{CE3B494D-E756-4408-A623-E97BF65EFE40}"/>
+                <a16:creationId xmlns:a16="http://schemas.microsoft.com/office/drawing/2014/main" id="{F1258C3D-C03D-4CD8-A9F2-4207D2D42256}"/>
               </a:ext>
             </a:extLst>
           </p:cNvPr>
@@ -2979,7 +2979,7 @@
           <p:cNvPr id="12" name="">
             <a:extLst xmlns:a="http://schemas.openxmlformats.org/drawingml/2006/main">
               <a:ext uri="{FF2B5EF4-FFF2-40B4-BE49-F238E27FC236}">
-                <a16:creationId xmlns:a16="http://schemas.microsoft.com/office/drawing/2014/main" id="{E5C614C3-4D3C-4FE0-919A-05EFBA81382B}"/>
+                <a16:creationId xmlns:a16="http://schemas.microsoft.com/office/drawing/2014/main" id="{023A5DE9-73D2-414C-A915-ACF8D90A836B}"/>
               </a:ext>
             </a:extLst>
           </p:cNvPr>
@@ -3036,7 +3036,7 @@
           <p:cNvPr id="13" name="">
             <a:extLst xmlns:a="http://schemas.openxmlformats.org/drawingml/2006/main">
               <a:ext uri="{FF2B5EF4-FFF2-40B4-BE49-F238E27FC236}">
-                <a16:creationId xmlns:a16="http://schemas.microsoft.com/office/drawing/2014/main" id="{E5656DBC-AD90-436F-8BBB-16EF8A0A7B38}"/>
+                <a16:creationId xmlns:a16="http://schemas.microsoft.com/office/drawing/2014/main" id="{D9F14BEB-0F78-467D-9238-3B7CE3C4247D}"/>
               </a:ext>
             </a:extLst>
           </p:cNvPr>
@@ -3091,7 +3091,7 @@
     </p:spTree>
     <p:extLst>
       <p:ext uri="{BB962C8B-B14F-4D97-AF65-F5344CB8AC3E}">
-        <p14:creationId xmlns:p14="http://schemas.microsoft.com/office/powerpoint/2010/main" val="654834270"/>
+        <p14:creationId xmlns:p14="http://schemas.microsoft.com/office/powerpoint/2010/main" val="2093842330"/>
       </p:ext>
     </p:extLst>
   </p:cSld>
@@ -3292,7 +3292,7 @@
           <p:cNvPr id="19" name="">
             <a:extLst xmlns:a="http://schemas.openxmlformats.org/drawingml/2006/main">
               <a:ext uri="{FF2B5EF4-FFF2-40B4-BE49-F238E27FC236}">
-                <a16:creationId xmlns:a16="http://schemas.microsoft.com/office/drawing/2014/main" id="{4646B933-32BE-49E7-A2E3-F003214B60B1}"/>
+                <a16:creationId xmlns:a16="http://schemas.microsoft.com/office/drawing/2014/main" id="{339AF125-D024-4D99-A8FF-BACF991EBC43}"/>
               </a:ext>
             </a:extLst>
           </p:cNvPr>
@@ -3324,7 +3324,7 @@
           <p:cNvPr id="2" name="">
             <a:extLst xmlns:a="http://schemas.openxmlformats.org/drawingml/2006/main">
               <a:ext uri="{FF2B5EF4-FFF2-40B4-BE49-F238E27FC236}">
-                <a16:creationId xmlns:a16="http://schemas.microsoft.com/office/drawing/2014/main" id="{F0A3ACB7-80AF-4899-9945-C20D7E5B5C7F}"/>
+                <a16:creationId xmlns:a16="http://schemas.microsoft.com/office/drawing/2014/main" id="{ED3470F1-81B4-4D87-AC10-C4EE1E45A4F2}"/>
               </a:ext>
             </a:extLst>
           </p:cNvPr>
@@ -3381,7 +3381,7 @@
           <p:cNvPr id="3" name="">
             <a:extLst xmlns:a="http://schemas.openxmlformats.org/drawingml/2006/main">
               <a:ext uri="{FF2B5EF4-FFF2-40B4-BE49-F238E27FC236}">
-                <a16:creationId xmlns:a16="http://schemas.microsoft.com/office/drawing/2014/main" id="{6AE5767D-FE09-4084-9156-A429F5A1A656}"/>
+                <a16:creationId xmlns:a16="http://schemas.microsoft.com/office/drawing/2014/main" id="{E72DEADF-13E5-442C-84F5-F8D3A5C2B068}"/>
               </a:ext>
             </a:extLst>
           </p:cNvPr>
@@ -3413,7 +3413,7 @@
           <p:cNvPr id="4" name="">
             <a:extLst xmlns:a="http://schemas.openxmlformats.org/drawingml/2006/main">
               <a:ext uri="{FF2B5EF4-FFF2-40B4-BE49-F238E27FC236}">
-                <a16:creationId xmlns:a16="http://schemas.microsoft.com/office/drawing/2014/main" id="{F6B849B1-09EF-4587-8621-215E094D784B}"/>
+                <a16:creationId xmlns:a16="http://schemas.microsoft.com/office/drawing/2014/main" id="{0C3741A5-EC67-4504-8519-C24118FD366B}"/>
               </a:ext>
             </a:extLst>
           </p:cNvPr>
@@ -3470,7 +3470,7 @@
           <p:cNvPr id="5" name="">
             <a:extLst xmlns:a="http://schemas.openxmlformats.org/drawingml/2006/main">
               <a:ext uri="{FF2B5EF4-FFF2-40B4-BE49-F238E27FC236}">
-                <a16:creationId xmlns:a16="http://schemas.microsoft.com/office/drawing/2014/main" id="{AA07A833-BB29-4F9B-A350-AF7E361A79FD}"/>
+                <a16:creationId xmlns:a16="http://schemas.microsoft.com/office/drawing/2014/main" id="{BDCE1390-6BB9-4763-BB92-2BD99EB5A931}"/>
               </a:ext>
             </a:extLst>
           </p:cNvPr>
@@ -3527,7 +3527,7 @@
           <p:cNvPr id="6" name="">
             <a:extLst xmlns:a="http://schemas.openxmlformats.org/drawingml/2006/main">
               <a:ext uri="{FF2B5EF4-FFF2-40B4-BE49-F238E27FC236}">
-                <a16:creationId xmlns:a16="http://schemas.microsoft.com/office/drawing/2014/main" id="{1F8353BE-B687-419B-8CD5-FF0ADD45D28C}"/>
+                <a16:creationId xmlns:a16="http://schemas.microsoft.com/office/drawing/2014/main" id="{EA1B97D4-76EB-4E83-9133-81BED2E3C9F7}"/>
               </a:ext>
             </a:extLst>
           </p:cNvPr>
@@ -3584,7 +3584,7 @@
           <p:cNvPr id="7" name="">
             <a:extLst xmlns:a="http://schemas.openxmlformats.org/drawingml/2006/main">
               <a:ext uri="{FF2B5EF4-FFF2-40B4-BE49-F238E27FC236}">
-                <a16:creationId xmlns:a16="http://schemas.microsoft.com/office/drawing/2014/main" id="{AD29F573-1727-4280-A93F-D29CD1F463CC}"/>
+                <a16:creationId xmlns:a16="http://schemas.microsoft.com/office/drawing/2014/main" id="{60B5A1F8-BD2B-4B85-8D05-F2ABBD465D56}"/>
               </a:ext>
             </a:extLst>
           </p:cNvPr>
@@ -3616,7 +3616,7 @@
           <p:cNvPr id="8" name="">
             <a:extLst xmlns:a="http://schemas.openxmlformats.org/drawingml/2006/main">
               <a:ext uri="{FF2B5EF4-FFF2-40B4-BE49-F238E27FC236}">
-                <a16:creationId xmlns:a16="http://schemas.microsoft.com/office/drawing/2014/main" id="{AECBABB2-ED86-44FE-85EE-D8A88483CAF8}"/>
+                <a16:creationId xmlns:a16="http://schemas.microsoft.com/office/drawing/2014/main" id="{D0B51E56-79DB-4FF8-A437-DA25B52B48F8}"/>
               </a:ext>
             </a:extLst>
           </p:cNvPr>
@@ -3673,7 +3673,7 @@
           <p:cNvPr id="9" name="">
             <a:extLst xmlns:a="http://schemas.openxmlformats.org/drawingml/2006/main">
               <a:ext uri="{FF2B5EF4-FFF2-40B4-BE49-F238E27FC236}">
-                <a16:creationId xmlns:a16="http://schemas.microsoft.com/office/drawing/2014/main" id="{744F0363-0E7B-4E23-A8E0-D2A31EF4DD63}"/>
+                <a16:creationId xmlns:a16="http://schemas.microsoft.com/office/drawing/2014/main" id="{F2133F50-A698-4D6E-AFFC-FA4CC2D91754}"/>
               </a:ext>
             </a:extLst>
           </p:cNvPr>
@@ -3730,7 +3730,7 @@
           <p:cNvPr id="10" name="">
             <a:extLst xmlns:a="http://schemas.openxmlformats.org/drawingml/2006/main">
               <a:ext uri="{FF2B5EF4-FFF2-40B4-BE49-F238E27FC236}">
-                <a16:creationId xmlns:a16="http://schemas.microsoft.com/office/drawing/2014/main" id="{6911EB0B-3E51-4B71-B58B-9EEC29045ADA}"/>
+                <a16:creationId xmlns:a16="http://schemas.microsoft.com/office/drawing/2014/main" id="{B626C54E-E61F-4FD1-B69C-239036CC9B09}"/>
               </a:ext>
             </a:extLst>
           </p:cNvPr>
@@ -3787,7 +3787,7 @@
           <p:cNvPr id="11" name="">
             <a:extLst xmlns:a="http://schemas.openxmlformats.org/drawingml/2006/main">
               <a:ext uri="{FF2B5EF4-FFF2-40B4-BE49-F238E27FC236}">
-                <a16:creationId xmlns:a16="http://schemas.microsoft.com/office/drawing/2014/main" id="{6E11431C-9894-49E2-871D-D82859A233A0}"/>
+                <a16:creationId xmlns:a16="http://schemas.microsoft.com/office/drawing/2014/main" id="{C2B15580-B957-4E06-8676-4F8FEECFBC44}"/>
               </a:ext>
             </a:extLst>
           </p:cNvPr>
@@ -3821,7 +3821,7 @@
           <p:cNvPr id="12" name="">
             <a:extLst xmlns:a="http://schemas.openxmlformats.org/drawingml/2006/main">
               <a:ext uri="{FF2B5EF4-FFF2-40B4-BE49-F238E27FC236}">
-                <a16:creationId xmlns:a16="http://schemas.microsoft.com/office/drawing/2014/main" id="{2CADCC39-3CEF-46B8-A17B-4D6E96ADB8E6}"/>
+                <a16:creationId xmlns:a16="http://schemas.microsoft.com/office/drawing/2014/main" id="{7B85B0B0-7070-404E-B256-DC7B8DF098A1}"/>
               </a:ext>
             </a:extLst>
           </p:cNvPr>
@@ -3878,7 +3878,7 @@
           <p:cNvPr id="13" name="">
             <a:extLst xmlns:a="http://schemas.openxmlformats.org/drawingml/2006/main">
               <a:ext uri="{FF2B5EF4-FFF2-40B4-BE49-F238E27FC236}">
-                <a16:creationId xmlns:a16="http://schemas.microsoft.com/office/drawing/2014/main" id="{75C6EBBA-1994-4F4E-ABD3-0C5BDA65DEFA}"/>
+                <a16:creationId xmlns:a16="http://schemas.microsoft.com/office/drawing/2014/main" id="{F1721EA3-5F00-47BC-AC62-35EB8705A14E}"/>
               </a:ext>
             </a:extLst>
           </p:cNvPr>
@@ -3935,7 +3935,7 @@
           <p:cNvPr id="14" name="">
             <a:extLst xmlns:a="http://schemas.openxmlformats.org/drawingml/2006/main">
               <a:ext uri="{FF2B5EF4-FFF2-40B4-BE49-F238E27FC236}">
-                <a16:creationId xmlns:a16="http://schemas.microsoft.com/office/drawing/2014/main" id="{1152003D-D52D-411B-86DD-556F1E76768F}"/>
+                <a16:creationId xmlns:a16="http://schemas.microsoft.com/office/drawing/2014/main" id="{1FFA3C52-F809-4966-BF57-E4B449E26F39}"/>
               </a:ext>
             </a:extLst>
           </p:cNvPr>
@@ -3992,7 +3992,7 @@
           <p:cNvPr id="15" name="">
             <a:extLst xmlns:a="http://schemas.openxmlformats.org/drawingml/2006/main">
               <a:ext uri="{FF2B5EF4-FFF2-40B4-BE49-F238E27FC236}">
-                <a16:creationId xmlns:a16="http://schemas.microsoft.com/office/drawing/2014/main" id="{52AAF1A1-E522-4BBA-B486-893BBDDFF2D9}"/>
+                <a16:creationId xmlns:a16="http://schemas.microsoft.com/office/drawing/2014/main" id="{08F9EB39-E1F3-44C7-B0AE-47B8882A8B1A}"/>
               </a:ext>
             </a:extLst>
           </p:cNvPr>
@@ -4026,7 +4026,7 @@
           <p:cNvPr id="16" name="">
             <a:extLst xmlns:a="http://schemas.openxmlformats.org/drawingml/2006/main">
               <a:ext uri="{FF2B5EF4-FFF2-40B4-BE49-F238E27FC236}">
-                <a16:creationId xmlns:a16="http://schemas.microsoft.com/office/drawing/2014/main" id="{9D34D190-0AB0-4F9D-942C-02308EF61BA8}"/>
+                <a16:creationId xmlns:a16="http://schemas.microsoft.com/office/drawing/2014/main" id="{9F06175A-C535-452A-A19F-94F8E93F3AC8}"/>
               </a:ext>
             </a:extLst>
           </p:cNvPr>
@@ -4083,7 +4083,7 @@
           <p:cNvPr id="17" name="">
             <a:extLst xmlns:a="http://schemas.openxmlformats.org/drawingml/2006/main">
               <a:ext uri="{FF2B5EF4-FFF2-40B4-BE49-F238E27FC236}">
-                <a16:creationId xmlns:a16="http://schemas.microsoft.com/office/drawing/2014/main" id="{1B2990DE-34E3-49BB-A17A-49C065F0AC00}"/>
+                <a16:creationId xmlns:a16="http://schemas.microsoft.com/office/drawing/2014/main" id="{B50F83BE-B9D5-4AEE-AADF-4B8D035FE8CB}"/>
               </a:ext>
             </a:extLst>
           </p:cNvPr>
@@ -4140,7 +4140,7 @@
           <p:cNvPr id="18" name="">
             <a:extLst xmlns:a="http://schemas.openxmlformats.org/drawingml/2006/main">
               <a:ext uri="{FF2B5EF4-FFF2-40B4-BE49-F238E27FC236}">
-                <a16:creationId xmlns:a16="http://schemas.microsoft.com/office/drawing/2014/main" id="{55A4CA2D-2839-4310-A6AB-42F3F08C7725}"/>
+                <a16:creationId xmlns:a16="http://schemas.microsoft.com/office/drawing/2014/main" id="{6BE9C289-4BDF-4F85-831B-6CBDEAF39D8E}"/>
               </a:ext>
             </a:extLst>
           </p:cNvPr>
@@ -4195,7 +4195,7 @@
     </p:spTree>
     <p:extLst>
       <p:ext uri="{BB962C8B-B14F-4D97-AF65-F5344CB8AC3E}">
-        <p14:creationId xmlns:p14="http://schemas.microsoft.com/office/powerpoint/2010/main" val="1109767240"/>
+        <p14:creationId xmlns:p14="http://schemas.microsoft.com/office/powerpoint/2010/main" val="1275128655"/>
       </p:ext>
     </p:extLst>
   </p:cSld>
@@ -4350,7 +4350,7 @@
           <p:cNvPr id="23" name="">
             <a:extLst xmlns:a="http://schemas.openxmlformats.org/drawingml/2006/main">
               <a:ext uri="{FF2B5EF4-FFF2-40B4-BE49-F238E27FC236}">
-                <a16:creationId xmlns:a16="http://schemas.microsoft.com/office/drawing/2014/main" id="{2FF56FA3-3A1A-4315-A0DA-44CFAEB18AC8}"/>
+                <a16:creationId xmlns:a16="http://schemas.microsoft.com/office/drawing/2014/main" id="{C99BE2DF-1827-49B1-8BEF-3980D6590C44}"/>
               </a:ext>
             </a:extLst>
           </p:cNvPr>
@@ -4382,7 +4382,7 @@
           <p:cNvPr id="2" name="">
             <a:extLst xmlns:a="http://schemas.openxmlformats.org/drawingml/2006/main">
               <a:ext uri="{FF2B5EF4-FFF2-40B4-BE49-F238E27FC236}">
-                <a16:creationId xmlns:a16="http://schemas.microsoft.com/office/drawing/2014/main" id="{8B496E47-4333-4B61-8EE8-3BFA4E746390}"/>
+                <a16:creationId xmlns:a16="http://schemas.microsoft.com/office/drawing/2014/main" id="{F1F9231D-6B71-43B4-9179-7269AEDD299F}"/>
               </a:ext>
             </a:extLst>
           </p:cNvPr>
@@ -4439,7 +4439,7 @@
           <p:cNvPr id="3" name="">
             <a:extLst xmlns:a="http://schemas.openxmlformats.org/drawingml/2006/main">
               <a:ext uri="{FF2B5EF4-FFF2-40B4-BE49-F238E27FC236}">
-                <a16:creationId xmlns:a16="http://schemas.microsoft.com/office/drawing/2014/main" id="{F65F2FFE-F819-48AE-A9A4-C861ED390E0E}"/>
+                <a16:creationId xmlns:a16="http://schemas.microsoft.com/office/drawing/2014/main" id="{3DD3740F-1B83-4F6A-9477-58EC18003579}"/>
               </a:ext>
             </a:extLst>
           </p:cNvPr>
@@ -4471,7 +4471,7 @@
           <p:cNvPr id="4" name="">
             <a:extLst xmlns:a="http://schemas.openxmlformats.org/drawingml/2006/main">
               <a:ext uri="{FF2B5EF4-FFF2-40B4-BE49-F238E27FC236}">
-                <a16:creationId xmlns:a16="http://schemas.microsoft.com/office/drawing/2014/main" id="{485D28C3-C65B-4A4D-B5B3-21C82A3AB9A5}"/>
+                <a16:creationId xmlns:a16="http://schemas.microsoft.com/office/drawing/2014/main" id="{D7DAAC59-4DB6-4500-9491-6E68A081593D}"/>
               </a:ext>
             </a:extLst>
           </p:cNvPr>
@@ -4528,7 +4528,7 @@
           <p:cNvPr id="5" name="">
             <a:extLst xmlns:a="http://schemas.openxmlformats.org/drawingml/2006/main">
               <a:ext uri="{FF2B5EF4-FFF2-40B4-BE49-F238E27FC236}">
-                <a16:creationId xmlns:a16="http://schemas.microsoft.com/office/drawing/2014/main" id="{CBF44585-2004-4C59-9007-97B5A0D10F4E}"/>
+                <a16:creationId xmlns:a16="http://schemas.microsoft.com/office/drawing/2014/main" id="{02625A18-B468-4479-B7FB-7D1A5C1B03C3}"/>
               </a:ext>
             </a:extLst>
           </p:cNvPr>
@@ -4585,7 +4585,7 @@
           <p:cNvPr id="6" name="">
             <a:extLst xmlns:a="http://schemas.openxmlformats.org/drawingml/2006/main">
               <a:ext uri="{FF2B5EF4-FFF2-40B4-BE49-F238E27FC236}">
-                <a16:creationId xmlns:a16="http://schemas.microsoft.com/office/drawing/2014/main" id="{73A24890-8BFD-4CD6-8809-CF8BAB4FDCF5}"/>
+                <a16:creationId xmlns:a16="http://schemas.microsoft.com/office/drawing/2014/main" id="{495A955C-2CDB-4E04-8C78-D4C418136B0A}"/>
               </a:ext>
             </a:extLst>
           </p:cNvPr>
@@ -4642,7 +4642,7 @@
           <p:cNvPr id="7" name="">
             <a:extLst xmlns:a="http://schemas.openxmlformats.org/drawingml/2006/main">
               <a:ext uri="{FF2B5EF4-FFF2-40B4-BE49-F238E27FC236}">
-                <a16:creationId xmlns:a16="http://schemas.microsoft.com/office/drawing/2014/main" id="{E539F816-B62A-4826-A559-59426B7A1BCD}"/>
+                <a16:creationId xmlns:a16="http://schemas.microsoft.com/office/drawing/2014/main" id="{7071A147-656A-4076-97AA-CC75B5425C58}"/>
               </a:ext>
             </a:extLst>
           </p:cNvPr>
@@ -4674,7 +4674,7 @@
           <p:cNvPr id="8" name="">
             <a:extLst xmlns:a="http://schemas.openxmlformats.org/drawingml/2006/main">
               <a:ext uri="{FF2B5EF4-FFF2-40B4-BE49-F238E27FC236}">
-                <a16:creationId xmlns:a16="http://schemas.microsoft.com/office/drawing/2014/main" id="{8B6A2AFA-0387-4853-9395-B9E727F18E51}"/>
+                <a16:creationId xmlns:a16="http://schemas.microsoft.com/office/drawing/2014/main" id="{2199C3AA-6A92-4131-94A4-BA6E0514EC9B}"/>
               </a:ext>
             </a:extLst>
           </p:cNvPr>
@@ -4731,7 +4731,7 @@
           <p:cNvPr id="9" name="">
             <a:extLst xmlns:a="http://schemas.openxmlformats.org/drawingml/2006/main">
               <a:ext uri="{FF2B5EF4-FFF2-40B4-BE49-F238E27FC236}">
-                <a16:creationId xmlns:a16="http://schemas.microsoft.com/office/drawing/2014/main" id="{CB022259-84BC-41B8-BD86-782B35F456E6}"/>
+                <a16:creationId xmlns:a16="http://schemas.microsoft.com/office/drawing/2014/main" id="{EFEB6654-9D92-4470-A832-043AD9955E59}"/>
               </a:ext>
             </a:extLst>
           </p:cNvPr>
@@ -4788,7 +4788,7 @@
           <p:cNvPr id="10" name="">
             <a:extLst xmlns:a="http://schemas.openxmlformats.org/drawingml/2006/main">
               <a:ext uri="{FF2B5EF4-FFF2-40B4-BE49-F238E27FC236}">
-                <a16:creationId xmlns:a16="http://schemas.microsoft.com/office/drawing/2014/main" id="{C0E15C72-6E56-4C10-BC92-9A426B34454A}"/>
+                <a16:creationId xmlns:a16="http://schemas.microsoft.com/office/drawing/2014/main" id="{DF19DB5E-D237-4A7B-BED7-1910DFD59D21}"/>
               </a:ext>
             </a:extLst>
           </p:cNvPr>
@@ -4822,7 +4822,7 @@
           <p:cNvPr id="11" name="">
             <a:extLst xmlns:a="http://schemas.openxmlformats.org/drawingml/2006/main">
               <a:ext uri="{FF2B5EF4-FFF2-40B4-BE49-F238E27FC236}">
-                <a16:creationId xmlns:a16="http://schemas.microsoft.com/office/drawing/2014/main" id="{C5CA41C2-257A-4D6A-A216-4FA0264B6CC7}"/>
+                <a16:creationId xmlns:a16="http://schemas.microsoft.com/office/drawing/2014/main" id="{70F343CB-F317-4208-B23C-ED62ED2D3A0A}"/>
               </a:ext>
             </a:extLst>
           </p:cNvPr>
@@ -4854,7 +4854,7 @@
           <p:cNvPr id="12" name="">
             <a:extLst xmlns:a="http://schemas.openxmlformats.org/drawingml/2006/main">
               <a:ext uri="{FF2B5EF4-FFF2-40B4-BE49-F238E27FC236}">
-                <a16:creationId xmlns:a16="http://schemas.microsoft.com/office/drawing/2014/main" id="{7D9D2CBE-46DB-4A1D-AFBC-FDF1C54567E5}"/>
+                <a16:creationId xmlns:a16="http://schemas.microsoft.com/office/drawing/2014/main" id="{DBE767CE-B391-418A-B879-4A4D50C3DCA8}"/>
               </a:ext>
             </a:extLst>
           </p:cNvPr>
@@ -4911,7 +4911,7 @@
           <p:cNvPr id="13" name="">
             <a:extLst xmlns:a="http://schemas.openxmlformats.org/drawingml/2006/main">
               <a:ext uri="{FF2B5EF4-FFF2-40B4-BE49-F238E27FC236}">
-                <a16:creationId xmlns:a16="http://schemas.microsoft.com/office/drawing/2014/main" id="{487B043F-B310-4364-9380-229009E55F8F}"/>
+                <a16:creationId xmlns:a16="http://schemas.microsoft.com/office/drawing/2014/main" id="{D69A6654-E9AA-4486-A1E7-D01CC21D88DC}"/>
               </a:ext>
             </a:extLst>
           </p:cNvPr>
@@ -4968,7 +4968,7 @@
           <p:cNvPr id="14" name="">
             <a:extLst xmlns:a="http://schemas.openxmlformats.org/drawingml/2006/main">
               <a:ext uri="{FF2B5EF4-FFF2-40B4-BE49-F238E27FC236}">
-                <a16:creationId xmlns:a16="http://schemas.microsoft.com/office/drawing/2014/main" id="{C2F95617-1232-438D-A6B4-8B2B2666C7B4}"/>
+                <a16:creationId xmlns:a16="http://schemas.microsoft.com/office/drawing/2014/main" id="{7D8C15B1-2965-44CC-899E-AA1FC394742A}"/>
               </a:ext>
             </a:extLst>
           </p:cNvPr>
@@ -5002,7 +5002,7 @@
           <p:cNvPr id="15" name="">
             <a:extLst xmlns:a="http://schemas.openxmlformats.org/drawingml/2006/main">
               <a:ext uri="{FF2B5EF4-FFF2-40B4-BE49-F238E27FC236}">
-                <a16:creationId xmlns:a16="http://schemas.microsoft.com/office/drawing/2014/main" id="{38286DF9-4C71-4ECA-BEA3-262A954D44AD}"/>
+                <a16:creationId xmlns:a16="http://schemas.microsoft.com/office/drawing/2014/main" id="{D29D757B-E64E-4633-AC33-DDBC8AA6A746}"/>
               </a:ext>
             </a:extLst>
           </p:cNvPr>
@@ -5034,7 +5034,7 @@
           <p:cNvPr id="16" name="">
             <a:extLst xmlns:a="http://schemas.openxmlformats.org/drawingml/2006/main">
               <a:ext uri="{FF2B5EF4-FFF2-40B4-BE49-F238E27FC236}">
-                <a16:creationId xmlns:a16="http://schemas.microsoft.com/office/drawing/2014/main" id="{A4FB26C0-36EE-428D-AD74-9BCB7D3CCDB3}"/>
+                <a16:creationId xmlns:a16="http://schemas.microsoft.com/office/drawing/2014/main" id="{731B0858-1918-492F-90CB-F765AC4A4CBF}"/>
               </a:ext>
             </a:extLst>
           </p:cNvPr>
@@ -5091,7 +5091,7 @@
           <p:cNvPr id="17" name="">
             <a:extLst xmlns:a="http://schemas.openxmlformats.org/drawingml/2006/main">
               <a:ext uri="{FF2B5EF4-FFF2-40B4-BE49-F238E27FC236}">
-                <a16:creationId xmlns:a16="http://schemas.microsoft.com/office/drawing/2014/main" id="{03961E08-8F4B-4138-A6D0-FD183F0675C1}"/>
+                <a16:creationId xmlns:a16="http://schemas.microsoft.com/office/drawing/2014/main" id="{E2867C7E-062A-42DE-82CF-8ADBB6DA07AD}"/>
               </a:ext>
             </a:extLst>
           </p:cNvPr>
@@ -5148,7 +5148,7 @@
           <p:cNvPr id="18" name="">
             <a:extLst xmlns:a="http://schemas.openxmlformats.org/drawingml/2006/main">
               <a:ext uri="{FF2B5EF4-FFF2-40B4-BE49-F238E27FC236}">
-                <a16:creationId xmlns:a16="http://schemas.microsoft.com/office/drawing/2014/main" id="{89825816-978D-4353-9F40-A1E9735A676A}"/>
+                <a16:creationId xmlns:a16="http://schemas.microsoft.com/office/drawing/2014/main" id="{3F8CE1D9-B7D3-44E3-990C-9CD6C1C61E53}"/>
               </a:ext>
             </a:extLst>
           </p:cNvPr>
@@ -5182,7 +5182,7 @@
           <p:cNvPr id="19" name="">
             <a:extLst xmlns:a="http://schemas.openxmlformats.org/drawingml/2006/main">
               <a:ext uri="{FF2B5EF4-FFF2-40B4-BE49-F238E27FC236}">
-                <a16:creationId xmlns:a16="http://schemas.microsoft.com/office/drawing/2014/main" id="{E074C410-AA65-4894-AA36-CE910356D4FA}"/>
+                <a16:creationId xmlns:a16="http://schemas.microsoft.com/office/drawing/2014/main" id="{1F45A3F4-9D43-4FD3-AB0F-8EBA76D31CB2}"/>
               </a:ext>
             </a:extLst>
           </p:cNvPr>
@@ -5214,7 +5214,7 @@
           <p:cNvPr id="20" name="">
             <a:extLst xmlns:a="http://schemas.openxmlformats.org/drawingml/2006/main">
               <a:ext uri="{FF2B5EF4-FFF2-40B4-BE49-F238E27FC236}">
-                <a16:creationId xmlns:a16="http://schemas.microsoft.com/office/drawing/2014/main" id="{05AD81DC-9991-4FA1-8C2A-E73CA85C6634}"/>
+                <a16:creationId xmlns:a16="http://schemas.microsoft.com/office/drawing/2014/main" id="{9FE19964-3BAD-457A-B471-DB2A975EE4E8}"/>
               </a:ext>
             </a:extLst>
           </p:cNvPr>
@@ -5271,7 +5271,7 @@
           <p:cNvPr id="21" name="">
             <a:extLst xmlns:a="http://schemas.openxmlformats.org/drawingml/2006/main">
               <a:ext uri="{FF2B5EF4-FFF2-40B4-BE49-F238E27FC236}">
-                <a16:creationId xmlns:a16="http://schemas.microsoft.com/office/drawing/2014/main" id="{44F8F4C1-65FA-47C8-B76C-2FB6DFEDC9D4}"/>
+                <a16:creationId xmlns:a16="http://schemas.microsoft.com/office/drawing/2014/main" id="{E9C92699-87ED-4424-AFD3-6137CC028A26}"/>
               </a:ext>
             </a:extLst>
           </p:cNvPr>
@@ -5328,7 +5328,7 @@
           <p:cNvPr id="22" name="">
             <a:extLst xmlns:a="http://schemas.openxmlformats.org/drawingml/2006/main">
               <a:ext uri="{FF2B5EF4-FFF2-40B4-BE49-F238E27FC236}">
-                <a16:creationId xmlns:a16="http://schemas.microsoft.com/office/drawing/2014/main" id="{5E9BBEB8-140B-4347-86E1-1B74397D8B6C}"/>
+                <a16:creationId xmlns:a16="http://schemas.microsoft.com/office/drawing/2014/main" id="{E29109D8-99C0-40F5-8386-93411E5B9B2D}"/>
               </a:ext>
             </a:extLst>
           </p:cNvPr>
@@ -5383,7 +5383,7 @@
     </p:spTree>
     <p:extLst>
       <p:ext uri="{BB962C8B-B14F-4D97-AF65-F5344CB8AC3E}">
-        <p14:creationId xmlns:p14="http://schemas.microsoft.com/office/powerpoint/2010/main" val="1393441899"/>
+        <p14:creationId xmlns:p14="http://schemas.microsoft.com/office/powerpoint/2010/main" val="2108803737"/>
       </p:ext>
     </p:extLst>
   </p:cSld>
@@ -5584,7 +5584,7 @@
           <p:cNvPr id="23" name="">
             <a:extLst xmlns:a="http://schemas.openxmlformats.org/drawingml/2006/main">
               <a:ext uri="{FF2B5EF4-FFF2-40B4-BE49-F238E27FC236}">
-                <a16:creationId xmlns:a16="http://schemas.microsoft.com/office/drawing/2014/main" id="{55D2B4A3-6129-4D1E-86C7-DFF4830245CF}"/>
+                <a16:creationId xmlns:a16="http://schemas.microsoft.com/office/drawing/2014/main" id="{E0D04E18-263C-46F4-BAAE-FF08B1E5157D}"/>
               </a:ext>
             </a:extLst>
           </p:cNvPr>
@@ -5616,7 +5616,7 @@
           <p:cNvPr id="2" name="">
             <a:extLst xmlns:a="http://schemas.openxmlformats.org/drawingml/2006/main">
               <a:ext uri="{FF2B5EF4-FFF2-40B4-BE49-F238E27FC236}">
-                <a16:creationId xmlns:a16="http://schemas.microsoft.com/office/drawing/2014/main" id="{19A5FA73-8FC2-4115-B992-DD99D5A01906}"/>
+                <a16:creationId xmlns:a16="http://schemas.microsoft.com/office/drawing/2014/main" id="{310D6CD7-9450-4340-B2A2-7DF81C708CE2}"/>
               </a:ext>
             </a:extLst>
           </p:cNvPr>
@@ -5673,7 +5673,7 @@
           <p:cNvPr id="3" name="">
             <a:extLst xmlns:a="http://schemas.openxmlformats.org/drawingml/2006/main">
               <a:ext uri="{FF2B5EF4-FFF2-40B4-BE49-F238E27FC236}">
-                <a16:creationId xmlns:a16="http://schemas.microsoft.com/office/drawing/2014/main" id="{FAB8F2E9-2ADE-4938-A8B4-D15144A9DCBC}"/>
+                <a16:creationId xmlns:a16="http://schemas.microsoft.com/office/drawing/2014/main" id="{611AB9DF-29DD-4CCA-89C4-B44EAE528978}"/>
               </a:ext>
             </a:extLst>
           </p:cNvPr>
@@ -5705,7 +5705,7 @@
           <p:cNvPr id="4" name="">
             <a:extLst xmlns:a="http://schemas.openxmlformats.org/drawingml/2006/main">
               <a:ext uri="{FF2B5EF4-FFF2-40B4-BE49-F238E27FC236}">
-                <a16:creationId xmlns:a16="http://schemas.microsoft.com/office/drawing/2014/main" id="{04E62376-77AD-4EFE-88BD-A083F0AE4A77}"/>
+                <a16:creationId xmlns:a16="http://schemas.microsoft.com/office/drawing/2014/main" id="{E22B8445-5C83-442E-92BE-20F10C89B4D3}"/>
               </a:ext>
             </a:extLst>
           </p:cNvPr>
@@ -5762,7 +5762,7 @@
           <p:cNvPr id="5" name="">
             <a:extLst xmlns:a="http://schemas.openxmlformats.org/drawingml/2006/main">
               <a:ext uri="{FF2B5EF4-FFF2-40B4-BE49-F238E27FC236}">
-                <a16:creationId xmlns:a16="http://schemas.microsoft.com/office/drawing/2014/main" id="{AF162EB1-DF68-482B-A296-2B73AA2A0177}"/>
+                <a16:creationId xmlns:a16="http://schemas.microsoft.com/office/drawing/2014/main" id="{E85C0E8B-80E4-49DB-835A-0544D9DC1B8D}"/>
               </a:ext>
             </a:extLst>
           </p:cNvPr>
@@ -5819,7 +5819,7 @@
           <p:cNvPr id="6" name="">
             <a:extLst xmlns:a="http://schemas.openxmlformats.org/drawingml/2006/main">
               <a:ext uri="{FF2B5EF4-FFF2-40B4-BE49-F238E27FC236}">
-                <a16:creationId xmlns:a16="http://schemas.microsoft.com/office/drawing/2014/main" id="{3398475F-74A8-4B0D-AE2C-8CCC46689FB2}"/>
+                <a16:creationId xmlns:a16="http://schemas.microsoft.com/office/drawing/2014/main" id="{4E8D4ADD-77FB-4E3A-93F2-07AC2F7EE60F}"/>
               </a:ext>
             </a:extLst>
           </p:cNvPr>
@@ -5876,7 +5876,7 @@
           <p:cNvPr id="7" name="">
             <a:extLst xmlns:a="http://schemas.openxmlformats.org/drawingml/2006/main">
               <a:ext uri="{FF2B5EF4-FFF2-40B4-BE49-F238E27FC236}">
-                <a16:creationId xmlns:a16="http://schemas.microsoft.com/office/drawing/2014/main" id="{75DDA2E9-A00E-451C-9359-D7B03FBFF216}"/>
+                <a16:creationId xmlns:a16="http://schemas.microsoft.com/office/drawing/2014/main" id="{3E28CF50-442B-4A7D-A63B-5F4DB7B751AF}"/>
               </a:ext>
             </a:extLst>
           </p:cNvPr>
@@ -5908,7 +5908,7 @@
           <p:cNvPr id="8" name="">
             <a:extLst xmlns:a="http://schemas.openxmlformats.org/drawingml/2006/main">
               <a:ext uri="{FF2B5EF4-FFF2-40B4-BE49-F238E27FC236}">
-                <a16:creationId xmlns:a16="http://schemas.microsoft.com/office/drawing/2014/main" id="{98B009AC-59F2-423C-B2CD-973E1F19D048}"/>
+                <a16:creationId xmlns:a16="http://schemas.microsoft.com/office/drawing/2014/main" id="{51F4167D-7CF0-4D4A-80E5-5C52E32CD0BC}"/>
               </a:ext>
             </a:extLst>
           </p:cNvPr>
@@ -5965,7 +5965,7 @@
           <p:cNvPr id="9" name="">
             <a:extLst xmlns:a="http://schemas.openxmlformats.org/drawingml/2006/main">
               <a:ext uri="{FF2B5EF4-FFF2-40B4-BE49-F238E27FC236}">
-                <a16:creationId xmlns:a16="http://schemas.microsoft.com/office/drawing/2014/main" id="{88B1AD27-28BC-4AEC-8797-37331E248912}"/>
+                <a16:creationId xmlns:a16="http://schemas.microsoft.com/office/drawing/2014/main" id="{1F27FB35-6E97-463C-9DB5-3DF5DFBDC989}"/>
               </a:ext>
             </a:extLst>
           </p:cNvPr>
@@ -6022,7 +6022,7 @@
           <p:cNvPr id="10" name="">
             <a:extLst xmlns:a="http://schemas.openxmlformats.org/drawingml/2006/main">
               <a:ext uri="{FF2B5EF4-FFF2-40B4-BE49-F238E27FC236}">
-                <a16:creationId xmlns:a16="http://schemas.microsoft.com/office/drawing/2014/main" id="{788DD98A-7F3E-45D2-80BD-C25C97DEEB87}"/>
+                <a16:creationId xmlns:a16="http://schemas.microsoft.com/office/drawing/2014/main" id="{CB4419B7-F3F3-434D-AF71-97FE9BC875B0}"/>
               </a:ext>
             </a:extLst>
           </p:cNvPr>
@@ -6056,7 +6056,7 @@
           <p:cNvPr id="11" name="">
             <a:extLst xmlns:a="http://schemas.openxmlformats.org/drawingml/2006/main">
               <a:ext uri="{FF2B5EF4-FFF2-40B4-BE49-F238E27FC236}">
-                <a16:creationId xmlns:a16="http://schemas.microsoft.com/office/drawing/2014/main" id="{3DBF3EF0-CB90-4904-A687-07BDBC8F7CF5}"/>
+                <a16:creationId xmlns:a16="http://schemas.microsoft.com/office/drawing/2014/main" id="{53101CF0-6984-4BA7-BB7A-0D72BE87D63F}"/>
               </a:ext>
             </a:extLst>
           </p:cNvPr>
@@ -6088,7 +6088,7 @@
           <p:cNvPr id="12" name="">
             <a:extLst xmlns:a="http://schemas.openxmlformats.org/drawingml/2006/main">
               <a:ext uri="{FF2B5EF4-FFF2-40B4-BE49-F238E27FC236}">
-                <a16:creationId xmlns:a16="http://schemas.microsoft.com/office/drawing/2014/main" id="{DCD7C48F-4843-40B0-8AFE-DB163643FA91}"/>
+                <a16:creationId xmlns:a16="http://schemas.microsoft.com/office/drawing/2014/main" id="{0CBE299B-AF17-4CAC-90FB-224CAAB86607}"/>
               </a:ext>
             </a:extLst>
           </p:cNvPr>
@@ -6145,7 +6145,7 @@
           <p:cNvPr id="13" name="">
             <a:extLst xmlns:a="http://schemas.openxmlformats.org/drawingml/2006/main">
               <a:ext uri="{FF2B5EF4-FFF2-40B4-BE49-F238E27FC236}">
-                <a16:creationId xmlns:a16="http://schemas.microsoft.com/office/drawing/2014/main" id="{8FEA703D-D4B4-400C-A7F6-AC377CC0B05B}"/>
+                <a16:creationId xmlns:a16="http://schemas.microsoft.com/office/drawing/2014/main" id="{81A1B847-FE61-4BC4-AE29-51BEDB51F0C4}"/>
               </a:ext>
             </a:extLst>
           </p:cNvPr>
@@ -6202,7 +6202,7 @@
           <p:cNvPr id="14" name="">
             <a:extLst xmlns:a="http://schemas.openxmlformats.org/drawingml/2006/main">
               <a:ext uri="{FF2B5EF4-FFF2-40B4-BE49-F238E27FC236}">
-                <a16:creationId xmlns:a16="http://schemas.microsoft.com/office/drawing/2014/main" id="{6D6B3BAE-798E-4FD1-8F9B-E8CC5117BA49}"/>
+                <a16:creationId xmlns:a16="http://schemas.microsoft.com/office/drawing/2014/main" id="{556A931F-BF83-416E-A922-39E259C008F7}"/>
               </a:ext>
             </a:extLst>
           </p:cNvPr>
@@ -6236,7 +6236,7 @@
           <p:cNvPr id="15" name="">
             <a:extLst xmlns:a="http://schemas.openxmlformats.org/drawingml/2006/main">
               <a:ext uri="{FF2B5EF4-FFF2-40B4-BE49-F238E27FC236}">
-                <a16:creationId xmlns:a16="http://schemas.microsoft.com/office/drawing/2014/main" id="{D8F877E2-CE94-44B7-A978-0F5B45393937}"/>
+                <a16:creationId xmlns:a16="http://schemas.microsoft.com/office/drawing/2014/main" id="{9646E336-D76D-47E8-A202-7B3C3DF08B70}"/>
               </a:ext>
             </a:extLst>
           </p:cNvPr>
@@ -6268,7 +6268,7 @@
           <p:cNvPr id="16" name="">
             <a:extLst xmlns:a="http://schemas.openxmlformats.org/drawingml/2006/main">
               <a:ext uri="{FF2B5EF4-FFF2-40B4-BE49-F238E27FC236}">
-                <a16:creationId xmlns:a16="http://schemas.microsoft.com/office/drawing/2014/main" id="{2D7EECA2-7273-4438-89D6-B25017DED963}"/>
+                <a16:creationId xmlns:a16="http://schemas.microsoft.com/office/drawing/2014/main" id="{2457C214-5F84-4557-A0F0-4FBD13F09A8D}"/>
               </a:ext>
             </a:extLst>
           </p:cNvPr>
@@ -6325,7 +6325,7 @@
           <p:cNvPr id="17" name="">
             <a:extLst xmlns:a="http://schemas.openxmlformats.org/drawingml/2006/main">
               <a:ext uri="{FF2B5EF4-FFF2-40B4-BE49-F238E27FC236}">
-                <a16:creationId xmlns:a16="http://schemas.microsoft.com/office/drawing/2014/main" id="{0FA62F65-6D1D-43C5-886D-C29E35148C90}"/>
+                <a16:creationId xmlns:a16="http://schemas.microsoft.com/office/drawing/2014/main" id="{3BDD2B87-A1CA-4468-AC6A-196038E996EA}"/>
               </a:ext>
             </a:extLst>
           </p:cNvPr>
@@ -6382,7 +6382,7 @@
           <p:cNvPr id="18" name="">
             <a:extLst xmlns:a="http://schemas.openxmlformats.org/drawingml/2006/main">
               <a:ext uri="{FF2B5EF4-FFF2-40B4-BE49-F238E27FC236}">
-                <a16:creationId xmlns:a16="http://schemas.microsoft.com/office/drawing/2014/main" id="{3B48A0DE-A84E-43FC-9851-C25BB22B271F}"/>
+                <a16:creationId xmlns:a16="http://schemas.microsoft.com/office/drawing/2014/main" id="{21663770-5374-43BC-BDBC-F2C66B8091FE}"/>
               </a:ext>
             </a:extLst>
           </p:cNvPr>
@@ -6416,7 +6416,7 @@
           <p:cNvPr id="19" name="">
             <a:extLst xmlns:a="http://schemas.openxmlformats.org/drawingml/2006/main">
               <a:ext uri="{FF2B5EF4-FFF2-40B4-BE49-F238E27FC236}">
-                <a16:creationId xmlns:a16="http://schemas.microsoft.com/office/drawing/2014/main" id="{7136C14B-88A6-4AF6-965F-8285B4FF82E8}"/>
+                <a16:creationId xmlns:a16="http://schemas.microsoft.com/office/drawing/2014/main" id="{F9B25AA3-0E8D-4106-BADA-F70563B3F83F}"/>
               </a:ext>
             </a:extLst>
           </p:cNvPr>
@@ -6448,7 +6448,7 @@
           <p:cNvPr id="20" name="">
             <a:extLst xmlns:a="http://schemas.openxmlformats.org/drawingml/2006/main">
               <a:ext uri="{FF2B5EF4-FFF2-40B4-BE49-F238E27FC236}">
-                <a16:creationId xmlns:a16="http://schemas.microsoft.com/office/drawing/2014/main" id="{AA130CF8-5EB1-41DD-97DF-572D838A9556}"/>
+                <a16:creationId xmlns:a16="http://schemas.microsoft.com/office/drawing/2014/main" id="{1199A3C8-1BF9-421F-99F0-007E8D1D2392}"/>
               </a:ext>
             </a:extLst>
           </p:cNvPr>
@@ -6505,7 +6505,7 @@
           <p:cNvPr id="21" name="">
             <a:extLst xmlns:a="http://schemas.openxmlformats.org/drawingml/2006/main">
               <a:ext uri="{FF2B5EF4-FFF2-40B4-BE49-F238E27FC236}">
-                <a16:creationId xmlns:a16="http://schemas.microsoft.com/office/drawing/2014/main" id="{41964A56-0CF2-45A3-B9A8-527EA9F27120}"/>
+                <a16:creationId xmlns:a16="http://schemas.microsoft.com/office/drawing/2014/main" id="{B2602D02-9343-4CC8-8C61-713986B6A2AA}"/>
               </a:ext>
             </a:extLst>
           </p:cNvPr>
@@ -6562,7 +6562,7 @@
           <p:cNvPr id="22" name="">
             <a:extLst xmlns:a="http://schemas.openxmlformats.org/drawingml/2006/main">
               <a:ext uri="{FF2B5EF4-FFF2-40B4-BE49-F238E27FC236}">
-                <a16:creationId xmlns:a16="http://schemas.microsoft.com/office/drawing/2014/main" id="{D06F7957-F583-42F3-BB56-2CC1AB464FBD}"/>
+                <a16:creationId xmlns:a16="http://schemas.microsoft.com/office/drawing/2014/main" id="{A160201D-F6B0-4269-9A1D-BC92E21F1DE8}"/>
               </a:ext>
             </a:extLst>
           </p:cNvPr>
@@ -6617,7 +6617,7 @@
     </p:spTree>
     <p:extLst>
       <p:ext uri="{BB962C8B-B14F-4D97-AF65-F5344CB8AC3E}">
-        <p14:creationId xmlns:p14="http://schemas.microsoft.com/office/powerpoint/2010/main" val="192868500"/>
+        <p14:creationId xmlns:p14="http://schemas.microsoft.com/office/powerpoint/2010/main" val="1232606809"/>
       </p:ext>
     </p:extLst>
   </p:cSld>
@@ -6818,7 +6818,7 @@
           <p:cNvPr id="16" name="">
             <a:extLst xmlns:a="http://schemas.openxmlformats.org/drawingml/2006/main">
               <a:ext uri="{FF2B5EF4-FFF2-40B4-BE49-F238E27FC236}">
-                <a16:creationId xmlns:a16="http://schemas.microsoft.com/office/drawing/2014/main" id="{5991DA89-9215-466D-8D43-5CFA96063BEE}"/>
+                <a16:creationId xmlns:a16="http://schemas.microsoft.com/office/drawing/2014/main" id="{49DE392C-AA1B-43C9-8138-D1FCF340D069}"/>
               </a:ext>
             </a:extLst>
           </p:cNvPr>
@@ -6850,7 +6850,7 @@
           <p:cNvPr id="2" name="">
             <a:extLst xmlns:a="http://schemas.openxmlformats.org/drawingml/2006/main">
               <a:ext uri="{FF2B5EF4-FFF2-40B4-BE49-F238E27FC236}">
-                <a16:creationId xmlns:a16="http://schemas.microsoft.com/office/drawing/2014/main" id="{74F65049-E77D-46FE-AA73-BFEC7ED036EF}"/>
+                <a16:creationId xmlns:a16="http://schemas.microsoft.com/office/drawing/2014/main" id="{3E11EF67-D5D2-4A8A-8BDB-AD6E896D5BBF}"/>
               </a:ext>
             </a:extLst>
           </p:cNvPr>
@@ -6907,7 +6907,7 @@
           <p:cNvPr id="3" name="">
             <a:extLst xmlns:a="http://schemas.openxmlformats.org/drawingml/2006/main">
               <a:ext uri="{FF2B5EF4-FFF2-40B4-BE49-F238E27FC236}">
-                <a16:creationId xmlns:a16="http://schemas.microsoft.com/office/drawing/2014/main" id="{756BBF01-EB74-4073-BCD6-9A12DA509F0D}"/>
+                <a16:creationId xmlns:a16="http://schemas.microsoft.com/office/drawing/2014/main" id="{593E09D1-0617-4DB8-BF0E-CFA9CCDFB3C0}"/>
               </a:ext>
             </a:extLst>
           </p:cNvPr>
@@ -6939,7 +6939,7 @@
           <p:cNvPr id="4" name="">
             <a:extLst xmlns:a="http://schemas.openxmlformats.org/drawingml/2006/main">
               <a:ext uri="{FF2B5EF4-FFF2-40B4-BE49-F238E27FC236}">
-                <a16:creationId xmlns:a16="http://schemas.microsoft.com/office/drawing/2014/main" id="{1866F4CC-E87F-4923-ADB2-E274EEE6CF3D}"/>
+                <a16:creationId xmlns:a16="http://schemas.microsoft.com/office/drawing/2014/main" id="{54026281-B7E7-4063-B4F3-ED1CB405AD95}"/>
               </a:ext>
             </a:extLst>
           </p:cNvPr>
@@ -6996,7 +6996,7 @@
           <p:cNvPr id="5" name="">
             <a:extLst xmlns:a="http://schemas.openxmlformats.org/drawingml/2006/main">
               <a:ext uri="{FF2B5EF4-FFF2-40B4-BE49-F238E27FC236}">
-                <a16:creationId xmlns:a16="http://schemas.microsoft.com/office/drawing/2014/main" id="{777124D0-27B5-4D4C-A7DA-FC8BB77D46D8}"/>
+                <a16:creationId xmlns:a16="http://schemas.microsoft.com/office/drawing/2014/main" id="{4947A876-8A8D-40B3-829B-202CFA31B906}"/>
               </a:ext>
             </a:extLst>
           </p:cNvPr>
@@ -7053,7 +7053,7 @@
           <p:cNvPr id="6" name="">
             <a:extLst xmlns:a="http://schemas.openxmlformats.org/drawingml/2006/main">
               <a:ext uri="{FF2B5EF4-FFF2-40B4-BE49-F238E27FC236}">
-                <a16:creationId xmlns:a16="http://schemas.microsoft.com/office/drawing/2014/main" id="{EBF79333-3C1F-4693-922C-97EACF4379C7}"/>
+                <a16:creationId xmlns:a16="http://schemas.microsoft.com/office/drawing/2014/main" id="{97D194E5-40AF-4AFE-992F-116043FB9362}"/>
               </a:ext>
             </a:extLst>
           </p:cNvPr>
@@ -7110,7 +7110,7 @@
           <p:cNvPr id="7" name="">
             <a:extLst xmlns:a="http://schemas.openxmlformats.org/drawingml/2006/main">
               <a:ext uri="{FF2B5EF4-FFF2-40B4-BE49-F238E27FC236}">
-                <a16:creationId xmlns:a16="http://schemas.microsoft.com/office/drawing/2014/main" id="{9FAD8F2F-DB7F-4050-BEBA-A47C7F844C4E}"/>
+                <a16:creationId xmlns:a16="http://schemas.microsoft.com/office/drawing/2014/main" id="{C0339EBF-5489-4591-8953-C02978808ABF}"/>
               </a:ext>
             </a:extLst>
           </p:cNvPr>
@@ -7142,7 +7142,7 @@
           <p:cNvPr id="8" name="">
             <a:extLst xmlns:a="http://schemas.openxmlformats.org/drawingml/2006/main">
               <a:ext uri="{FF2B5EF4-FFF2-40B4-BE49-F238E27FC236}">
-                <a16:creationId xmlns:a16="http://schemas.microsoft.com/office/drawing/2014/main" id="{0111CD55-0224-4D3A-83A8-2212E9047D80}"/>
+                <a16:creationId xmlns:a16="http://schemas.microsoft.com/office/drawing/2014/main" id="{BE8A394C-2E54-476D-B9EF-7F665CB9B8CA}"/>
               </a:ext>
             </a:extLst>
           </p:cNvPr>
@@ -7199,7 +7199,7 @@
           <p:cNvPr id="9" name="">
             <a:extLst xmlns:a="http://schemas.openxmlformats.org/drawingml/2006/main">
               <a:ext uri="{FF2B5EF4-FFF2-40B4-BE49-F238E27FC236}">
-                <a16:creationId xmlns:a16="http://schemas.microsoft.com/office/drawing/2014/main" id="{97DD9B11-6D7F-4F60-ACA8-F9F52421F581}"/>
+                <a16:creationId xmlns:a16="http://schemas.microsoft.com/office/drawing/2014/main" id="{0E667DA0-23FD-48B7-A47E-B546917AB0C2}"/>
               </a:ext>
             </a:extLst>
           </p:cNvPr>
@@ -7256,7 +7256,7 @@
           <p:cNvPr id="10" name="">
             <a:extLst xmlns:a="http://schemas.openxmlformats.org/drawingml/2006/main">
               <a:ext uri="{FF2B5EF4-FFF2-40B4-BE49-F238E27FC236}">
-                <a16:creationId xmlns:a16="http://schemas.microsoft.com/office/drawing/2014/main" id="{56E7A556-5C3B-404C-A19F-844A672EBA3A}"/>
+                <a16:creationId xmlns:a16="http://schemas.microsoft.com/office/drawing/2014/main" id="{8BFA4E83-1AC7-40E9-8E5D-47E112DE8973}"/>
               </a:ext>
             </a:extLst>
           </p:cNvPr>
@@ -7313,7 +7313,7 @@
           <p:cNvPr id="11" name="">
             <a:extLst xmlns:a="http://schemas.openxmlformats.org/drawingml/2006/main">
               <a:ext uri="{FF2B5EF4-FFF2-40B4-BE49-F238E27FC236}">
-                <a16:creationId xmlns:a16="http://schemas.microsoft.com/office/drawing/2014/main" id="{0D50C1A6-5CE6-4740-933C-AF696F5979C3}"/>
+                <a16:creationId xmlns:a16="http://schemas.microsoft.com/office/drawing/2014/main" id="{FDAC6C84-51F2-4B89-AAB7-D3E7AABE5E85}"/>
               </a:ext>
             </a:extLst>
           </p:cNvPr>
@@ -7345,7 +7345,7 @@
           <p:cNvPr id="12" name="">
             <a:extLst xmlns:a="http://schemas.openxmlformats.org/drawingml/2006/main">
               <a:ext uri="{FF2B5EF4-FFF2-40B4-BE49-F238E27FC236}">
-                <a16:creationId xmlns:a16="http://schemas.microsoft.com/office/drawing/2014/main" id="{D0EFF7D3-3E2F-4864-8A32-FD5C7ECD39E6}"/>
+                <a16:creationId xmlns:a16="http://schemas.microsoft.com/office/drawing/2014/main" id="{9748C26F-3083-4D6C-BD05-4316B0E3B121}"/>
               </a:ext>
             </a:extLst>
           </p:cNvPr>
@@ -7402,7 +7402,7 @@
           <p:cNvPr id="13" name="">
             <a:extLst xmlns:a="http://schemas.openxmlformats.org/drawingml/2006/main">
               <a:ext uri="{FF2B5EF4-FFF2-40B4-BE49-F238E27FC236}">
-                <a16:creationId xmlns:a16="http://schemas.microsoft.com/office/drawing/2014/main" id="{84D9794D-7C1C-4C80-A241-284D7E2C39DB}"/>
+                <a16:creationId xmlns:a16="http://schemas.microsoft.com/office/drawing/2014/main" id="{29BAD6CD-A74A-42DF-8655-39E08182A603}"/>
               </a:ext>
             </a:extLst>
           </p:cNvPr>
@@ -7459,7 +7459,7 @@
           <p:cNvPr id="14" name="">
             <a:extLst xmlns:a="http://schemas.openxmlformats.org/drawingml/2006/main">
               <a:ext uri="{FF2B5EF4-FFF2-40B4-BE49-F238E27FC236}">
-                <a16:creationId xmlns:a16="http://schemas.microsoft.com/office/drawing/2014/main" id="{34F8D7B9-61D1-4DC9-991A-B689D9978E68}"/>
+                <a16:creationId xmlns:a16="http://schemas.microsoft.com/office/drawing/2014/main" id="{50F506F3-7BA7-4B4D-A436-AE0C972FA5CE}"/>
               </a:ext>
             </a:extLst>
           </p:cNvPr>
@@ -7516,7 +7516,7 @@
           <p:cNvPr id="15" name="">
             <a:extLst xmlns:a="http://schemas.openxmlformats.org/drawingml/2006/main">
               <a:ext uri="{FF2B5EF4-FFF2-40B4-BE49-F238E27FC236}">
-                <a16:creationId xmlns:a16="http://schemas.microsoft.com/office/drawing/2014/main" id="{2BB78454-1DAF-4B70-B1DC-9DFC81D74434}"/>
+                <a16:creationId xmlns:a16="http://schemas.microsoft.com/office/drawing/2014/main" id="{CDD64821-512F-4485-9C6D-BB05D8EE5F86}"/>
               </a:ext>
             </a:extLst>
           </p:cNvPr>
@@ -7571,7 +7571,7 @@
     </p:spTree>
     <p:extLst>
       <p:ext uri="{BB962C8B-B14F-4D97-AF65-F5344CB8AC3E}">
-        <p14:creationId xmlns:p14="http://schemas.microsoft.com/office/powerpoint/2010/main" val="1273915250"/>
+        <p14:creationId xmlns:p14="http://schemas.microsoft.com/office/powerpoint/2010/main" val="1638050827"/>
       </p:ext>
     </p:extLst>
   </p:cSld>
@@ -7769,10 +7769,10 @@
       </p:grpSpPr>
       <p:sp>
         <p:nvSpPr>
-          <p:cNvPr id="21" name="">
-            <a:extLst xmlns:a="http://schemas.openxmlformats.org/drawingml/2006/main">
-              <a:ext uri="{FF2B5EF4-FFF2-40B4-BE49-F238E27FC236}">
-                <a16:creationId xmlns:a16="http://schemas.microsoft.com/office/drawing/2014/main" id="{00D3B41F-6B97-4485-9A84-D7CFE4DD25D1}"/>
+          <p:cNvPr id="29" name="">
+            <a:extLst xmlns:a="http://schemas.openxmlformats.org/drawingml/2006/main">
+              <a:ext uri="{FF2B5EF4-FFF2-40B4-BE49-F238E27FC236}">
+                <a16:creationId xmlns:a16="http://schemas.microsoft.com/office/drawing/2014/main" id="{BAFC2C97-EFE2-4F6C-A789-14EAFC96B02E}"/>
               </a:ext>
             </a:extLst>
           </p:cNvPr>
@@ -7804,7 +7804,7 @@
           <p:cNvPr id="2" name="">
             <a:extLst xmlns:a="http://schemas.openxmlformats.org/drawingml/2006/main">
               <a:ext uri="{FF2B5EF4-FFF2-40B4-BE49-F238E27FC236}">
-                <a16:creationId xmlns:a16="http://schemas.microsoft.com/office/drawing/2014/main" id="{860A74C5-8ADA-4EBC-AEA0-7F61A6B98AF2}"/>
+                <a16:creationId xmlns:a16="http://schemas.microsoft.com/office/drawing/2014/main" id="{EC24AAAB-EAFC-4751-8A8F-F41D40C90D21}"/>
               </a:ext>
             </a:extLst>
           </p:cNvPr>
@@ -7861,7 +7861,7 @@
           <p:cNvPr id="3" name="">
             <a:extLst xmlns:a="http://schemas.openxmlformats.org/drawingml/2006/main">
               <a:ext uri="{FF2B5EF4-FFF2-40B4-BE49-F238E27FC236}">
-                <a16:creationId xmlns:a16="http://schemas.microsoft.com/office/drawing/2014/main" id="{2C27398C-ED71-463C-91FD-4475949719C4}"/>
+                <a16:creationId xmlns:a16="http://schemas.microsoft.com/office/drawing/2014/main" id="{C8FFAC26-8C14-43CC-8974-16DE0A0198CB}"/>
               </a:ext>
             </a:extLst>
           </p:cNvPr>
@@ -7893,7 +7893,7 @@
           <p:cNvPr id="4" name="">
             <a:extLst xmlns:a="http://schemas.openxmlformats.org/drawingml/2006/main">
               <a:ext uri="{FF2B5EF4-FFF2-40B4-BE49-F238E27FC236}">
-                <a16:creationId xmlns:a16="http://schemas.microsoft.com/office/drawing/2014/main" id="{443059EE-EA27-499F-8B59-016F764C8A04}"/>
+                <a16:creationId xmlns:a16="http://schemas.microsoft.com/office/drawing/2014/main" id="{F2D3A260-15A8-4458-BE9C-FA05DA99A8A8}"/>
               </a:ext>
             </a:extLst>
           </p:cNvPr>
@@ -7950,7 +7950,7 @@
           <p:cNvPr id="5" name="">
             <a:extLst xmlns:a="http://schemas.openxmlformats.org/drawingml/2006/main">
               <a:ext uri="{FF2B5EF4-FFF2-40B4-BE49-F238E27FC236}">
-                <a16:creationId xmlns:a16="http://schemas.microsoft.com/office/drawing/2014/main" id="{FC71D021-7757-4AAE-813D-B9A6980B1B96}"/>
+                <a16:creationId xmlns:a16="http://schemas.microsoft.com/office/drawing/2014/main" id="{233B61C8-634F-4D3B-A2B2-84EAEDFB4518}"/>
               </a:ext>
             </a:extLst>
           </p:cNvPr>
@@ -8007,7 +8007,7 @@
           <p:cNvPr id="6" name="">
             <a:extLst xmlns:a="http://schemas.openxmlformats.org/drawingml/2006/main">
               <a:ext uri="{FF2B5EF4-FFF2-40B4-BE49-F238E27FC236}">
-                <a16:creationId xmlns:a16="http://schemas.microsoft.com/office/drawing/2014/main" id="{036460D9-1EE1-4BB4-B641-8FA67012FD72}"/>
+                <a16:creationId xmlns:a16="http://schemas.microsoft.com/office/drawing/2014/main" id="{F1203FD7-71B3-48A3-A61D-D6310F9FF9C1}"/>
               </a:ext>
             </a:extLst>
           </p:cNvPr>
@@ -8064,7 +8064,7 @@
           <p:cNvPr id="7" name="">
             <a:extLst xmlns:a="http://schemas.openxmlformats.org/drawingml/2006/main">
               <a:ext uri="{FF2B5EF4-FFF2-40B4-BE49-F238E27FC236}">
-                <a16:creationId xmlns:a16="http://schemas.microsoft.com/office/drawing/2014/main" id="{0C864968-1DCF-44F2-BC64-B5AE858B2C88}"/>
+                <a16:creationId xmlns:a16="http://schemas.microsoft.com/office/drawing/2014/main" id="{34D77415-8D4D-4D95-AA42-8CEF3EBFA6A2}"/>
               </a:ext>
             </a:extLst>
           </p:cNvPr>
@@ -8096,7 +8096,7 @@
           <p:cNvPr id="8" name="">
             <a:extLst xmlns:a="http://schemas.openxmlformats.org/drawingml/2006/main">
               <a:ext uri="{FF2B5EF4-FFF2-40B4-BE49-F238E27FC236}">
-                <a16:creationId xmlns:a16="http://schemas.microsoft.com/office/drawing/2014/main" id="{282862EF-BDE0-4DD0-B88C-70BE3188B543}"/>
+                <a16:creationId xmlns:a16="http://schemas.microsoft.com/office/drawing/2014/main" id="{4B42565C-4FE8-42F2-9559-DECB5D106B3D}"/>
               </a:ext>
             </a:extLst>
           </p:cNvPr>
@@ -8153,7 +8153,7 @@
           <p:cNvPr id="9" name="">
             <a:extLst xmlns:a="http://schemas.openxmlformats.org/drawingml/2006/main">
               <a:ext uri="{FF2B5EF4-FFF2-40B4-BE49-F238E27FC236}">
-                <a16:creationId xmlns:a16="http://schemas.microsoft.com/office/drawing/2014/main" id="{CA178534-1F80-460B-B5F1-B43E3615BBBA}"/>
+                <a16:creationId xmlns:a16="http://schemas.microsoft.com/office/drawing/2014/main" id="{6C941A9C-0DE1-4895-8277-9E87C399799C}"/>
               </a:ext>
             </a:extLst>
           </p:cNvPr>
@@ -8210,19 +8210,19 @@
           <p:cNvPr id="10" name="">
             <a:extLst xmlns:a="http://schemas.openxmlformats.org/drawingml/2006/main">
               <a:ext uri="{FF2B5EF4-FFF2-40B4-BE49-F238E27FC236}">
-                <a16:creationId xmlns:a16="http://schemas.microsoft.com/office/drawing/2014/main" id="{C2E4D30F-8C97-47F4-B182-B1377EA8178D}"/>
-              </a:ext>
-            </a:extLst>
-          </p:cNvPr>
-          <p:cNvSpPr>
-            <a:spLocks xmlns:a="http://schemas.openxmlformats.org/drawingml/2006/main" noGrp="1"/>
-          </p:cNvSpPr>
-          <p:nvPr/>
-        </p:nvSpPr>
-        <p:spPr>
-          <a:xfrm xmlns:a="http://schemas.openxmlformats.org/drawingml/2006/main">
-            <a:off x="914400" y="1257300"/>
-            <a:ext cx="10363200" cy="781050"/>
+                <a16:creationId xmlns:a16="http://schemas.microsoft.com/office/drawing/2014/main" id="{99DE67F7-E872-41BC-AAD7-8104ECCDA872}"/>
+              </a:ext>
+            </a:extLst>
+          </p:cNvPr>
+          <p:cNvSpPr>
+            <a:spLocks xmlns:a="http://schemas.openxmlformats.org/drawingml/2006/main" noGrp="1"/>
+          </p:cNvSpPr>
+          <p:nvPr/>
+        </p:nvSpPr>
+        <p:spPr>
+          <a:xfrm xmlns:a="http://schemas.openxmlformats.org/drawingml/2006/main">
+            <a:off x="857250" y="1219200"/>
+            <a:ext cx="10477500" cy="742950"/>
           </a:xfrm>
           <a:prstGeom xmlns:a="http://schemas.openxmlformats.org/drawingml/2006/main" prst="rect">
             <a:avLst/>
@@ -8239,7 +8239,7 @@
           <a:lstStyle xmlns:a="http://schemas.openxmlformats.org/drawingml/2006/main"/>
           <a:p xmlns:a="http://schemas.openxmlformats.org/drawingml/2006/main">
             <a:pPr algn="ctr">
-              <a:defRPr sz="2175" b="1">
+              <a:defRPr sz="2100" b="1">
                 <a:solidFill>
                   <a:srgbClr val="17253A"/>
                 </a:solidFill>
@@ -8249,7 +8249,7 @@
               </a:defRPr>
             </a:pPr>
             <a:r>
-              <a:rPr sz="2175" b="1">
+              <a:rPr sz="2100" b="1">
                 <a:solidFill>
                   <a:srgbClr val="17253A"/>
                 </a:solidFill>
@@ -8267,29 +8267,173 @@
           <p:cNvPr id="11" name="">
             <a:extLst xmlns:a="http://schemas.openxmlformats.org/drawingml/2006/main">
               <a:ext uri="{FF2B5EF4-FFF2-40B4-BE49-F238E27FC236}">
-                <a16:creationId xmlns:a16="http://schemas.microsoft.com/office/drawing/2014/main" id="{9D2B684C-EDEF-4C92-B62F-D216332AF203}"/>
-              </a:ext>
-            </a:extLst>
-          </p:cNvPr>
-          <p:cNvSpPr>
-            <a:spLocks xmlns:a="http://schemas.openxmlformats.org/drawingml/2006/main" noGrp="1"/>
-          </p:cNvSpPr>
-          <p:nvPr/>
-        </p:nvSpPr>
-        <p:spPr>
-          <a:xfrm xmlns:a="http://schemas.openxmlformats.org/drawingml/2006/main">
-            <a:off x="685800" y="2247900"/>
-            <a:ext cx="3905250" cy="3333750"/>
-          </a:xfrm>
-          <a:prstGeom xmlns:a="http://schemas.openxmlformats.org/drawingml/2006/main" prst="roundRect">
-            <a:avLst>
-              <a:gd name="adj" fmla="val 2286"/>
-            </a:avLst>
+                <a16:creationId xmlns:a16="http://schemas.microsoft.com/office/drawing/2014/main" id="{46EBB3C0-7BA1-46D5-A942-7D5E347E705B}"/>
+              </a:ext>
+            </a:extLst>
+          </p:cNvPr>
+          <p:cNvSpPr>
+            <a:spLocks xmlns:a="http://schemas.openxmlformats.org/drawingml/2006/main" noGrp="1"/>
+          </p:cNvSpPr>
+          <p:nvPr/>
+        </p:nvSpPr>
+        <p:spPr>
+          <a:xfrm xmlns:a="http://schemas.openxmlformats.org/drawingml/2006/main">
+            <a:off x="971550" y="2124075"/>
+            <a:ext cx="38100" cy="3524250"/>
+          </a:xfrm>
+          <a:prstGeom xmlns:a="http://schemas.openxmlformats.org/drawingml/2006/main" prst="rect">
+            <a:avLst/>
           </a:prstGeom>
           <a:solidFill xmlns:a="http://schemas.openxmlformats.org/drawingml/2006/main">
-            <a:srgbClr val="FFFFFF"/>
+            <a:srgbClr val="2C6E73"/>
           </a:solidFill>
-          <a:ln xmlns:a="http://schemas.openxmlformats.org/drawingml/2006/main" w="12383">
+          <a:ln xmlns:a="http://schemas.openxmlformats.org/drawingml/2006/main" w="0">
+            <a:solidFill>
+              <a:srgbClr val="2C6E73"/>
+            </a:solidFill>
+          </a:ln>
+        </p:spPr>
+      </p:sp>
+      <p:sp>
+        <p:nvSpPr>
+          <p:cNvPr id="12" name="">
+            <a:extLst xmlns:a="http://schemas.openxmlformats.org/drawingml/2006/main">
+              <a:ext uri="{FF2B5EF4-FFF2-40B4-BE49-F238E27FC236}">
+                <a16:creationId xmlns:a16="http://schemas.microsoft.com/office/drawing/2014/main" id="{48117492-0C3E-4253-8F83-2FACC8A715E6}"/>
+              </a:ext>
+            </a:extLst>
+          </p:cNvPr>
+          <p:cNvSpPr>
+            <a:spLocks xmlns:a="http://schemas.openxmlformats.org/drawingml/2006/main" noGrp="1"/>
+          </p:cNvSpPr>
+          <p:nvPr/>
+        </p:nvSpPr>
+        <p:spPr>
+          <a:xfrm xmlns:a="http://schemas.openxmlformats.org/drawingml/2006/main">
+            <a:off x="1162050" y="2200275"/>
+            <a:ext cx="400050" cy="400050"/>
+          </a:xfrm>
+          <a:prstGeom xmlns:a="http://schemas.openxmlformats.org/drawingml/2006/main" prst="rect">
+            <a:avLst/>
+          </a:prstGeom>
+          <a:noFill xmlns:a="http://schemas.openxmlformats.org/drawingml/2006/main"/>
+          <a:ln xmlns:a="http://schemas.openxmlformats.org/drawingml/2006/main" w="0">
+            <a:noFill/>
+          </a:ln>
+        </p:spPr>
+        <p:txBody>
+          <a:bodyPr xmlns:a="http://schemas.openxmlformats.org/drawingml/2006/main" anchor="ctr">
+            <a:normAutofit fontScale="100000"/>
+          </a:bodyPr>
+          <a:lstStyle xmlns:a="http://schemas.openxmlformats.org/drawingml/2006/main"/>
+          <a:p xmlns:a="http://schemas.openxmlformats.org/drawingml/2006/main">
+            <a:pPr algn="ctr">
+              <a:defRPr sz="1125" b="1">
+                <a:solidFill>
+                  <a:srgbClr val="2C6E73"/>
+                </a:solidFill>
+                <a:latin typeface="Arial"/>
+                <a:ea typeface="Arial"/>
+                <a:cs typeface="Arial"/>
+              </a:defRPr>
+            </a:pPr>
+            <a:r>
+              <a:rPr sz="1125" b="1">
+                <a:solidFill>
+                  <a:srgbClr val="2C6E73"/>
+                </a:solidFill>
+                <a:latin typeface="Arial"/>
+                <a:ea typeface="Arial"/>
+                <a:cs typeface="Arial"/>
+              </a:rPr>
+              <a:t>1</a:t>
+            </a:r>
+          </a:p>
+        </p:txBody>
+      </p:sp>
+      <p:sp>
+        <p:nvSpPr>
+          <p:cNvPr id="13" name="">
+            <a:extLst xmlns:a="http://schemas.openxmlformats.org/drawingml/2006/main">
+              <a:ext uri="{FF2B5EF4-FFF2-40B4-BE49-F238E27FC236}">
+                <a16:creationId xmlns:a16="http://schemas.microsoft.com/office/drawing/2014/main" id="{06530A2E-4E86-4240-A93C-2E43E69C8F7B}"/>
+              </a:ext>
+            </a:extLst>
+          </p:cNvPr>
+          <p:cNvSpPr>
+            <a:spLocks xmlns:a="http://schemas.openxmlformats.org/drawingml/2006/main" noGrp="1"/>
+          </p:cNvSpPr>
+          <p:nvPr/>
+        </p:nvSpPr>
+        <p:spPr>
+          <a:xfrm xmlns:a="http://schemas.openxmlformats.org/drawingml/2006/main">
+            <a:off x="1714500" y="2114550"/>
+            <a:ext cx="9525000" cy="514350"/>
+          </a:xfrm>
+          <a:prstGeom xmlns:a="http://schemas.openxmlformats.org/drawingml/2006/main" prst="rect">
+            <a:avLst/>
+          </a:prstGeom>
+          <a:noFill xmlns:a="http://schemas.openxmlformats.org/drawingml/2006/main"/>
+          <a:ln xmlns:a="http://schemas.openxmlformats.org/drawingml/2006/main" w="0">
+            <a:noFill/>
+          </a:ln>
+        </p:spPr>
+        <p:txBody>
+          <a:bodyPr xmlns:a="http://schemas.openxmlformats.org/drawingml/2006/main" anchor="ctr">
+            <a:normAutofit fontScale="100000"/>
+          </a:bodyPr>
+          <a:lstStyle xmlns:a="http://schemas.openxmlformats.org/drawingml/2006/main"/>
+          <a:p xmlns:a="http://schemas.openxmlformats.org/drawingml/2006/main">
+            <a:pPr algn="l">
+              <a:defRPr sz="1350" b="0">
+                <a:solidFill>
+                  <a:srgbClr val="17253A"/>
+                </a:solidFill>
+                <a:latin typeface="Arial"/>
+                <a:ea typeface="Arial"/>
+                <a:cs typeface="Arial"/>
+              </a:defRPr>
+            </a:pPr>
+            <a:r>
+              <a:rPr sz="1350" b="0">
+                <a:solidFill>
+                  <a:srgbClr val="17253A"/>
+                </a:solidFill>
+                <a:latin typeface="Arial"/>
+                <a:ea typeface="Arial"/>
+                <a:cs typeface="Arial"/>
+              </a:rPr>
+              <a:t>24 times table: 24, 48, 72, 96, 120, 144, 168, 192, 216</a:t>
+            </a:r>
+          </a:p>
+        </p:txBody>
+      </p:sp>
+      <p:sp>
+        <p:nvSpPr>
+          <p:cNvPr id="14" name="">
+            <a:extLst xmlns:a="http://schemas.openxmlformats.org/drawingml/2006/main">
+              <a:ext uri="{FF2B5EF4-FFF2-40B4-BE49-F238E27FC236}">
+                <a16:creationId xmlns:a16="http://schemas.microsoft.com/office/drawing/2014/main" id="{56D21C8B-7E07-4E56-BE5F-DCB83D1C168E}"/>
+              </a:ext>
+            </a:extLst>
+          </p:cNvPr>
+          <p:cNvSpPr>
+            <a:spLocks xmlns:a="http://schemas.openxmlformats.org/drawingml/2006/main" noGrp="1"/>
+          </p:cNvSpPr>
+          <p:nvPr/>
+        </p:nvSpPr>
+        <p:spPr>
+          <a:xfrm xmlns:a="http://schemas.openxmlformats.org/drawingml/2006/main">
+            <a:off x="1714500" y="2647950"/>
+            <a:ext cx="9334500" cy="9525"/>
+          </a:xfrm>
+          <a:prstGeom xmlns:a="http://schemas.openxmlformats.org/drawingml/2006/main" prst="rect">
+            <a:avLst/>
+          </a:prstGeom>
+          <a:solidFill xmlns:a="http://schemas.openxmlformats.org/drawingml/2006/main">
+            <a:srgbClr val="D9E0E6"/>
+          </a:solidFill>
+          <a:ln xmlns:a="http://schemas.openxmlformats.org/drawingml/2006/main" w="0">
             <a:solidFill>
               <a:srgbClr val="D9E0E6"/>
             </a:solidFill>
@@ -8298,22 +8442,22 @@
       </p:sp>
       <p:sp>
         <p:nvSpPr>
-          <p:cNvPr id="12" name="">
-            <a:extLst xmlns:a="http://schemas.openxmlformats.org/drawingml/2006/main">
-              <a:ext uri="{FF2B5EF4-FFF2-40B4-BE49-F238E27FC236}">
-                <a16:creationId xmlns:a16="http://schemas.microsoft.com/office/drawing/2014/main" id="{BAB746DD-F8E5-4885-B2C0-FB465A592C89}"/>
-              </a:ext>
-            </a:extLst>
-          </p:cNvPr>
-          <p:cNvSpPr>
-            <a:spLocks xmlns:a="http://schemas.openxmlformats.org/drawingml/2006/main" noGrp="1"/>
-          </p:cNvSpPr>
-          <p:nvPr/>
-        </p:nvSpPr>
-        <p:spPr>
-          <a:xfrm xmlns:a="http://schemas.openxmlformats.org/drawingml/2006/main">
-            <a:off x="933450" y="2400300"/>
-            <a:ext cx="3390900" cy="323850"/>
+          <p:cNvPr id="15" name="">
+            <a:extLst xmlns:a="http://schemas.openxmlformats.org/drawingml/2006/main">
+              <a:ext uri="{FF2B5EF4-FFF2-40B4-BE49-F238E27FC236}">
+                <a16:creationId xmlns:a16="http://schemas.microsoft.com/office/drawing/2014/main" id="{374A6BDF-6BEB-4FC1-B03B-6D661FB2C984}"/>
+              </a:ext>
+            </a:extLst>
+          </p:cNvPr>
+          <p:cNvSpPr>
+            <a:spLocks xmlns:a="http://schemas.openxmlformats.org/drawingml/2006/main" noGrp="1"/>
+          </p:cNvSpPr>
+          <p:nvPr/>
+        </p:nvSpPr>
+        <p:spPr>
+          <a:xfrm xmlns:a="http://schemas.openxmlformats.org/drawingml/2006/main">
+            <a:off x="1162050" y="2781300"/>
+            <a:ext cx="400050" cy="400050"/>
           </a:xfrm>
           <a:prstGeom xmlns:a="http://schemas.openxmlformats.org/drawingml/2006/main" prst="rect">
             <a:avLst/>
@@ -8330,7 +8474,7 @@
           <a:lstStyle xmlns:a="http://schemas.openxmlformats.org/drawingml/2006/main"/>
           <a:p xmlns:a="http://schemas.openxmlformats.org/drawingml/2006/main">
             <a:pPr algn="ctr">
-              <a:defRPr sz="1350" b="1">
+              <a:defRPr sz="1125" b="1">
                 <a:solidFill>
                   <a:srgbClr val="2C6E73"/>
                 </a:solidFill>
@@ -8340,7 +8484,7 @@
               </a:defRPr>
             </a:pPr>
             <a:r>
-              <a:rPr sz="1350" b="1">
+              <a:rPr sz="1125" b="1">
                 <a:solidFill>
                   <a:srgbClr val="2C6E73"/>
                 </a:solidFill>
@@ -8348,29 +8492,29 @@
                 <a:ea typeface="Arial"/>
                 <a:cs typeface="Arial"/>
               </a:rPr>
-              <a:t>Useful multiples</a:t>
-            </a:r>
-          </a:p>
-        </p:txBody>
-      </p:sp>
-      <p:sp>
-        <p:nvSpPr>
-          <p:cNvPr id="13" name="">
-            <a:extLst xmlns:a="http://schemas.openxmlformats.org/drawingml/2006/main">
-              <a:ext uri="{FF2B5EF4-FFF2-40B4-BE49-F238E27FC236}">
-                <a16:creationId xmlns:a16="http://schemas.microsoft.com/office/drawing/2014/main" id="{D647BA8F-4527-4C99-B811-4309F0E936D4}"/>
-              </a:ext>
-            </a:extLst>
-          </p:cNvPr>
-          <p:cNvSpPr>
-            <a:spLocks xmlns:a="http://schemas.openxmlformats.org/drawingml/2006/main" noGrp="1"/>
-          </p:cNvSpPr>
-          <p:nvPr/>
-        </p:nvSpPr>
-        <p:spPr>
-          <a:xfrm xmlns:a="http://schemas.openxmlformats.org/drawingml/2006/main">
-            <a:off x="914400" y="2952750"/>
-            <a:ext cx="3448050" cy="514350"/>
+              <a:t>2</a:t>
+            </a:r>
+          </a:p>
+        </p:txBody>
+      </p:sp>
+      <p:sp>
+        <p:nvSpPr>
+          <p:cNvPr id="16" name="">
+            <a:extLst xmlns:a="http://schemas.openxmlformats.org/drawingml/2006/main">
+              <a:ext uri="{FF2B5EF4-FFF2-40B4-BE49-F238E27FC236}">
+                <a16:creationId xmlns:a16="http://schemas.microsoft.com/office/drawing/2014/main" id="{05EB4D4C-4344-42B3-934C-2089818D7AB6}"/>
+              </a:ext>
+            </a:extLst>
+          </p:cNvPr>
+          <p:cNvSpPr>
+            <a:spLocks xmlns:a="http://schemas.openxmlformats.org/drawingml/2006/main" noGrp="1"/>
+          </p:cNvSpPr>
+          <p:nvPr/>
+        </p:nvSpPr>
+        <p:spPr>
+          <a:xfrm xmlns:a="http://schemas.openxmlformats.org/drawingml/2006/main">
+            <a:off x="1714500" y="2695575"/>
+            <a:ext cx="9525000" cy="514350"/>
           </a:xfrm>
           <a:prstGeom xmlns:a="http://schemas.openxmlformats.org/drawingml/2006/main" prst="rect">
             <a:avLst/>
@@ -8386,8 +8530,8 @@
           </a:bodyPr>
           <a:lstStyle xmlns:a="http://schemas.openxmlformats.org/drawingml/2006/main"/>
           <a:p xmlns:a="http://schemas.openxmlformats.org/drawingml/2006/main">
-            <a:pPr algn="ctr">
-              <a:defRPr sz="1275" b="1">
+            <a:pPr algn="l">
+              <a:defRPr sz="1350" b="0">
                 <a:solidFill>
                   <a:srgbClr val="17253A"/>
                 </a:solidFill>
@@ -8397,7 +8541,7 @@
               </a:defRPr>
             </a:pPr>
             <a:r>
-              <a:rPr sz="1275" b="1">
+              <a:rPr sz="1350" b="0">
                 <a:solidFill>
                   <a:srgbClr val="17253A"/>
                 </a:solidFill>
@@ -8405,29 +8549,61 @@
                 <a:ea typeface="Arial"/>
                 <a:cs typeface="Arial"/>
               </a:rPr>
-              <a:t>1 × 24 = 24     2 × 24 = 48     3 × 24 = 72</a:t>
-            </a:r>
-          </a:p>
-        </p:txBody>
-      </p:sp>
-      <p:sp>
-        <p:nvSpPr>
-          <p:cNvPr id="14" name="">
-            <a:extLst xmlns:a="http://schemas.openxmlformats.org/drawingml/2006/main">
-              <a:ext uri="{FF2B5EF4-FFF2-40B4-BE49-F238E27FC236}">
-                <a16:creationId xmlns:a16="http://schemas.microsoft.com/office/drawing/2014/main" id="{91D2DAA5-32A7-4B1C-AFA7-897956C1D165}"/>
-              </a:ext>
-            </a:extLst>
-          </p:cNvPr>
-          <p:cNvSpPr>
-            <a:spLocks xmlns:a="http://schemas.openxmlformats.org/drawingml/2006/main" noGrp="1"/>
-          </p:cNvSpPr>
-          <p:nvPr/>
-        </p:nvSpPr>
-        <p:spPr>
-          <a:xfrm xmlns:a="http://schemas.openxmlformats.org/drawingml/2006/main">
-            <a:off x="914400" y="3695700"/>
-            <a:ext cx="3448050" cy="514350"/>
+              <a:t>87 ÷ 24: choose 72 = 24 × 3; write 3</a:t>
+            </a:r>
+          </a:p>
+        </p:txBody>
+      </p:sp>
+      <p:sp>
+        <p:nvSpPr>
+          <p:cNvPr id="17" name="">
+            <a:extLst xmlns:a="http://schemas.openxmlformats.org/drawingml/2006/main">
+              <a:ext uri="{FF2B5EF4-FFF2-40B4-BE49-F238E27FC236}">
+                <a16:creationId xmlns:a16="http://schemas.microsoft.com/office/drawing/2014/main" id="{EE7C442F-F6C3-4CB2-A490-E0B02F100F55}"/>
+              </a:ext>
+            </a:extLst>
+          </p:cNvPr>
+          <p:cNvSpPr>
+            <a:spLocks xmlns:a="http://schemas.openxmlformats.org/drawingml/2006/main" noGrp="1"/>
+          </p:cNvSpPr>
+          <p:nvPr/>
+        </p:nvSpPr>
+        <p:spPr>
+          <a:xfrm xmlns:a="http://schemas.openxmlformats.org/drawingml/2006/main">
+            <a:off x="1714500" y="3228975"/>
+            <a:ext cx="9334500" cy="9525"/>
+          </a:xfrm>
+          <a:prstGeom xmlns:a="http://schemas.openxmlformats.org/drawingml/2006/main" prst="rect">
+            <a:avLst/>
+          </a:prstGeom>
+          <a:solidFill xmlns:a="http://schemas.openxmlformats.org/drawingml/2006/main">
+            <a:srgbClr val="D9E0E6"/>
+          </a:solidFill>
+          <a:ln xmlns:a="http://schemas.openxmlformats.org/drawingml/2006/main" w="0">
+            <a:solidFill>
+              <a:srgbClr val="D9E0E6"/>
+            </a:solidFill>
+          </a:ln>
+        </p:spPr>
+      </p:sp>
+      <p:sp>
+        <p:nvSpPr>
+          <p:cNvPr id="18" name="">
+            <a:extLst xmlns:a="http://schemas.openxmlformats.org/drawingml/2006/main">
+              <a:ext uri="{FF2B5EF4-FFF2-40B4-BE49-F238E27FC236}">
+                <a16:creationId xmlns:a16="http://schemas.microsoft.com/office/drawing/2014/main" id="{CA10BBA1-27E6-4A19-B510-815AA86FFB9F}"/>
+              </a:ext>
+            </a:extLst>
+          </p:cNvPr>
+          <p:cNvSpPr>
+            <a:spLocks xmlns:a="http://schemas.openxmlformats.org/drawingml/2006/main" noGrp="1"/>
+          </p:cNvSpPr>
+          <p:nvPr/>
+        </p:nvSpPr>
+        <p:spPr>
+          <a:xfrm xmlns:a="http://schemas.openxmlformats.org/drawingml/2006/main">
+            <a:off x="1162050" y="3362325"/>
+            <a:ext cx="400050" cy="400050"/>
           </a:xfrm>
           <a:prstGeom xmlns:a="http://schemas.openxmlformats.org/drawingml/2006/main" prst="rect">
             <a:avLst/>
@@ -8444,9 +8620,9 @@
           <a:lstStyle xmlns:a="http://schemas.openxmlformats.org/drawingml/2006/main"/>
           <a:p xmlns:a="http://schemas.openxmlformats.org/drawingml/2006/main">
             <a:pPr algn="ctr">
-              <a:defRPr sz="1275" b="1">
-                <a:solidFill>
-                  <a:srgbClr val="17253A"/>
+              <a:defRPr sz="1125" b="1">
+                <a:solidFill>
+                  <a:srgbClr val="2C6E73"/>
                 </a:solidFill>
                 <a:latin typeface="Arial"/>
                 <a:ea typeface="Arial"/>
@@ -8454,37 +8630,37 @@
               </a:defRPr>
             </a:pPr>
             <a:r>
-              <a:rPr sz="1275" b="1">
-                <a:solidFill>
-                  <a:srgbClr val="17253A"/>
+              <a:rPr sz="1125" b="1">
+                <a:solidFill>
+                  <a:srgbClr val="2C6E73"/>
                 </a:solidFill>
                 <a:latin typeface="Arial"/>
                 <a:ea typeface="Arial"/>
                 <a:cs typeface="Arial"/>
               </a:rPr>
-              <a:t>4 × 24 = 96     5 × 24 = 120     6 × 24 = 144</a:t>
-            </a:r>
-          </a:p>
-        </p:txBody>
-      </p:sp>
-      <p:sp>
-        <p:nvSpPr>
-          <p:cNvPr id="15" name="">
-            <a:extLst xmlns:a="http://schemas.openxmlformats.org/drawingml/2006/main">
-              <a:ext uri="{FF2B5EF4-FFF2-40B4-BE49-F238E27FC236}">
-                <a16:creationId xmlns:a16="http://schemas.microsoft.com/office/drawing/2014/main" id="{3D37C24E-7CB9-46D1-B250-DF4E39E770C0}"/>
-              </a:ext>
-            </a:extLst>
-          </p:cNvPr>
-          <p:cNvSpPr>
-            <a:spLocks xmlns:a="http://schemas.openxmlformats.org/drawingml/2006/main" noGrp="1"/>
-          </p:cNvSpPr>
-          <p:nvPr/>
-        </p:nvSpPr>
-        <p:spPr>
-          <a:xfrm xmlns:a="http://schemas.openxmlformats.org/drawingml/2006/main">
-            <a:off x="914400" y="4438650"/>
-            <a:ext cx="3448050" cy="514350"/>
+              <a:t>3</a:t>
+            </a:r>
+          </a:p>
+        </p:txBody>
+      </p:sp>
+      <p:sp>
+        <p:nvSpPr>
+          <p:cNvPr id="19" name="">
+            <a:extLst xmlns:a="http://schemas.openxmlformats.org/drawingml/2006/main">
+              <a:ext uri="{FF2B5EF4-FFF2-40B4-BE49-F238E27FC236}">
+                <a16:creationId xmlns:a16="http://schemas.microsoft.com/office/drawing/2014/main" id="{B06B0384-F046-4FBF-AFA3-60EE21F8A1A1}"/>
+              </a:ext>
+            </a:extLst>
+          </p:cNvPr>
+          <p:cNvSpPr>
+            <a:spLocks xmlns:a="http://schemas.openxmlformats.org/drawingml/2006/main" noGrp="1"/>
+          </p:cNvSpPr>
+          <p:nvPr/>
+        </p:nvSpPr>
+        <p:spPr>
+          <a:xfrm xmlns:a="http://schemas.openxmlformats.org/drawingml/2006/main">
+            <a:off x="1714500" y="3276600"/>
+            <a:ext cx="9525000" cy="514350"/>
           </a:xfrm>
           <a:prstGeom xmlns:a="http://schemas.openxmlformats.org/drawingml/2006/main" prst="rect">
             <a:avLst/>
@@ -8500,8 +8676,8 @@
           </a:bodyPr>
           <a:lstStyle xmlns:a="http://schemas.openxmlformats.org/drawingml/2006/main"/>
           <a:p xmlns:a="http://schemas.openxmlformats.org/drawingml/2006/main">
-            <a:pPr algn="ctr">
-              <a:defRPr sz="1275" b="1">
+            <a:pPr algn="l">
+              <a:defRPr sz="1350" b="0">
                 <a:solidFill>
                   <a:srgbClr val="17253A"/>
                 </a:solidFill>
@@ -8511,7 +8687,7 @@
               </a:defRPr>
             </a:pPr>
             <a:r>
-              <a:rPr sz="1275" b="1">
+              <a:rPr sz="1350" b="0">
                 <a:solidFill>
                   <a:srgbClr val="17253A"/>
                 </a:solidFill>
@@ -8519,39 +8695,37 @@
                 <a:ea typeface="Arial"/>
                 <a:cs typeface="Arial"/>
               </a:rPr>
-              <a:t>7 × 24 = 168     8 × 24 = 192     9 × 24 = 216</a:t>
-            </a:r>
-          </a:p>
-        </p:txBody>
-      </p:sp>
-      <p:sp>
-        <p:nvSpPr>
-          <p:cNvPr id="16" name="">
-            <a:extLst xmlns:a="http://schemas.openxmlformats.org/drawingml/2006/main">
-              <a:ext uri="{FF2B5EF4-FFF2-40B4-BE49-F238E27FC236}">
-                <a16:creationId xmlns:a16="http://schemas.microsoft.com/office/drawing/2014/main" id="{8A3160CC-C7F0-45B6-B9A2-E2E70FA83A6B}"/>
-              </a:ext>
-            </a:extLst>
-          </p:cNvPr>
-          <p:cNvSpPr>
-            <a:spLocks xmlns:a="http://schemas.openxmlformats.org/drawingml/2006/main" noGrp="1"/>
-          </p:cNvSpPr>
-          <p:nvPr/>
-        </p:nvSpPr>
-        <p:spPr>
-          <a:xfrm xmlns:a="http://schemas.openxmlformats.org/drawingml/2006/main">
-            <a:off x="4857750" y="2247900"/>
-            <a:ext cx="6648450" cy="3333750"/>
-          </a:xfrm>
-          <a:prstGeom xmlns:a="http://schemas.openxmlformats.org/drawingml/2006/main" prst="roundRect">
-            <a:avLst>
-              <a:gd name="adj" fmla="val 2286"/>
-            </a:avLst>
+              <a:t>87 - 72 = 15; bring down 3 → 153; choose 144; write 6</a:t>
+            </a:r>
+          </a:p>
+        </p:txBody>
+      </p:sp>
+      <p:sp>
+        <p:nvSpPr>
+          <p:cNvPr id="20" name="">
+            <a:extLst xmlns:a="http://schemas.openxmlformats.org/drawingml/2006/main">
+              <a:ext uri="{FF2B5EF4-FFF2-40B4-BE49-F238E27FC236}">
+                <a16:creationId xmlns:a16="http://schemas.microsoft.com/office/drawing/2014/main" id="{285C8FF8-F5D3-4C61-9185-4992F0801264}"/>
+              </a:ext>
+            </a:extLst>
+          </p:cNvPr>
+          <p:cNvSpPr>
+            <a:spLocks xmlns:a="http://schemas.openxmlformats.org/drawingml/2006/main" noGrp="1"/>
+          </p:cNvSpPr>
+          <p:nvPr/>
+        </p:nvSpPr>
+        <p:spPr>
+          <a:xfrm xmlns:a="http://schemas.openxmlformats.org/drawingml/2006/main">
+            <a:off x="1714500" y="3810000"/>
+            <a:ext cx="9334500" cy="9525"/>
+          </a:xfrm>
+          <a:prstGeom xmlns:a="http://schemas.openxmlformats.org/drawingml/2006/main" prst="rect">
+            <a:avLst/>
           </a:prstGeom>
           <a:solidFill xmlns:a="http://schemas.openxmlformats.org/drawingml/2006/main">
-            <a:srgbClr val="E7F1F1"/>
+            <a:srgbClr val="D9E0E6"/>
           </a:solidFill>
-          <a:ln xmlns:a="http://schemas.openxmlformats.org/drawingml/2006/main" w="12383">
+          <a:ln xmlns:a="http://schemas.openxmlformats.org/drawingml/2006/main" w="0">
             <a:solidFill>
               <a:srgbClr val="D9E0E6"/>
             </a:solidFill>
@@ -8560,22 +8734,22 @@
       </p:sp>
       <p:sp>
         <p:nvSpPr>
-          <p:cNvPr id="17" name="">
-            <a:extLst xmlns:a="http://schemas.openxmlformats.org/drawingml/2006/main">
-              <a:ext uri="{FF2B5EF4-FFF2-40B4-BE49-F238E27FC236}">
-                <a16:creationId xmlns:a16="http://schemas.microsoft.com/office/drawing/2014/main" id="{8B823BDE-67DC-4D4B-970A-73F483BFD44C}"/>
-              </a:ext>
-            </a:extLst>
-          </p:cNvPr>
-          <p:cNvSpPr>
-            <a:spLocks xmlns:a="http://schemas.openxmlformats.org/drawingml/2006/main" noGrp="1"/>
-          </p:cNvSpPr>
-          <p:nvPr/>
-        </p:nvSpPr>
-        <p:spPr>
-          <a:xfrm xmlns:a="http://schemas.openxmlformats.org/drawingml/2006/main">
-            <a:off x="5143500" y="2400300"/>
-            <a:ext cx="6096000" cy="590550"/>
+          <p:cNvPr id="21" name="">
+            <a:extLst xmlns:a="http://schemas.openxmlformats.org/drawingml/2006/main">
+              <a:ext uri="{FF2B5EF4-FFF2-40B4-BE49-F238E27FC236}">
+                <a16:creationId xmlns:a16="http://schemas.microsoft.com/office/drawing/2014/main" id="{5918A131-253D-4FDA-B700-9A1A1C4B6964}"/>
+              </a:ext>
+            </a:extLst>
+          </p:cNvPr>
+          <p:cNvSpPr>
+            <a:spLocks xmlns:a="http://schemas.openxmlformats.org/drawingml/2006/main" noGrp="1"/>
+          </p:cNvSpPr>
+          <p:nvPr/>
+        </p:nvSpPr>
+        <p:spPr>
+          <a:xfrm xmlns:a="http://schemas.openxmlformats.org/drawingml/2006/main">
+            <a:off x="1162050" y="3943350"/>
+            <a:ext cx="400050" cy="400050"/>
           </a:xfrm>
           <a:prstGeom xmlns:a="http://schemas.openxmlformats.org/drawingml/2006/main" prst="rect">
             <a:avLst/>
@@ -8591,10 +8765,10 @@
           </a:bodyPr>
           <a:lstStyle xmlns:a="http://schemas.openxmlformats.org/drawingml/2006/main"/>
           <a:p xmlns:a="http://schemas.openxmlformats.org/drawingml/2006/main">
-            <a:pPr algn="l">
-              <a:defRPr sz="1350" b="0">
-                <a:solidFill>
-                  <a:srgbClr val="17253A"/>
+            <a:pPr algn="ctr">
+              <a:defRPr sz="1125" b="1">
+                <a:solidFill>
+                  <a:srgbClr val="2C6E73"/>
                 </a:solidFill>
                 <a:latin typeface="Arial"/>
                 <a:ea typeface="Arial"/>
@@ -8602,37 +8776,37 @@
               </a:defRPr>
             </a:pPr>
             <a:r>
-              <a:rPr sz="1350" b="0">
-                <a:solidFill>
-                  <a:srgbClr val="17253A"/>
+              <a:rPr sz="1125" b="1">
+                <a:solidFill>
+                  <a:srgbClr val="2C6E73"/>
                 </a:solidFill>
                 <a:latin typeface="Arial"/>
                 <a:ea typeface="Arial"/>
                 <a:cs typeface="Arial"/>
               </a:rPr>
-              <a:t>1. 87 ÷ 24 = 3. Write 3; subtract 72; remainder 15. Bring down 3.</a:t>
-            </a:r>
-          </a:p>
-        </p:txBody>
-      </p:sp>
-      <p:sp>
-        <p:nvSpPr>
-          <p:cNvPr id="18" name="">
-            <a:extLst xmlns:a="http://schemas.openxmlformats.org/drawingml/2006/main">
-              <a:ext uri="{FF2B5EF4-FFF2-40B4-BE49-F238E27FC236}">
-                <a16:creationId xmlns:a16="http://schemas.microsoft.com/office/drawing/2014/main" id="{1CD6E683-7305-4E3F-9F61-8279232B4080}"/>
-              </a:ext>
-            </a:extLst>
-          </p:cNvPr>
-          <p:cNvSpPr>
-            <a:spLocks xmlns:a="http://schemas.openxmlformats.org/drawingml/2006/main" noGrp="1"/>
-          </p:cNvSpPr>
-          <p:nvPr/>
-        </p:nvSpPr>
-        <p:spPr>
-          <a:xfrm xmlns:a="http://schemas.openxmlformats.org/drawingml/2006/main">
-            <a:off x="5143500" y="3133725"/>
-            <a:ext cx="6096000" cy="590550"/>
+              <a:t>4</a:t>
+            </a:r>
+          </a:p>
+        </p:txBody>
+      </p:sp>
+      <p:sp>
+        <p:nvSpPr>
+          <p:cNvPr id="22" name="">
+            <a:extLst xmlns:a="http://schemas.openxmlformats.org/drawingml/2006/main">
+              <a:ext uri="{FF2B5EF4-FFF2-40B4-BE49-F238E27FC236}">
+                <a16:creationId xmlns:a16="http://schemas.microsoft.com/office/drawing/2014/main" id="{3DA72A98-9002-4082-B272-66EAA12FF662}"/>
+              </a:ext>
+            </a:extLst>
+          </p:cNvPr>
+          <p:cNvSpPr>
+            <a:spLocks xmlns:a="http://schemas.openxmlformats.org/drawingml/2006/main" noGrp="1"/>
+          </p:cNvSpPr>
+          <p:nvPr/>
+        </p:nvSpPr>
+        <p:spPr>
+          <a:xfrm xmlns:a="http://schemas.openxmlformats.org/drawingml/2006/main">
+            <a:off x="1714500" y="3857625"/>
+            <a:ext cx="9525000" cy="514350"/>
           </a:xfrm>
           <a:prstGeom xmlns:a="http://schemas.openxmlformats.org/drawingml/2006/main" prst="rect">
             <a:avLst/>
@@ -8667,29 +8841,61 @@
                 <a:ea typeface="Arial"/>
                 <a:cs typeface="Arial"/>
               </a:rPr>
-              <a:t>2. 153 ÷ 24 = 6. Write 6; subtract 144; remainder 9. Bring down 6.</a:t>
-            </a:r>
-          </a:p>
-        </p:txBody>
-      </p:sp>
-      <p:sp>
-        <p:nvSpPr>
-          <p:cNvPr id="19" name="">
-            <a:extLst xmlns:a="http://schemas.openxmlformats.org/drawingml/2006/main">
-              <a:ext uri="{FF2B5EF4-FFF2-40B4-BE49-F238E27FC236}">
-                <a16:creationId xmlns:a16="http://schemas.microsoft.com/office/drawing/2014/main" id="{F21167F6-231E-4463-9258-DFB92029E1A3}"/>
-              </a:ext>
-            </a:extLst>
-          </p:cNvPr>
-          <p:cNvSpPr>
-            <a:spLocks xmlns:a="http://schemas.openxmlformats.org/drawingml/2006/main" noGrp="1"/>
-          </p:cNvSpPr>
-          <p:nvPr/>
-        </p:nvSpPr>
-        <p:spPr>
-          <a:xfrm xmlns:a="http://schemas.openxmlformats.org/drawingml/2006/main">
-            <a:off x="5143500" y="3867150"/>
-            <a:ext cx="6096000" cy="590550"/>
+              <a:t>153 - 144 = 9; bring down 6 → 96; choose 96; write 4</a:t>
+            </a:r>
+          </a:p>
+        </p:txBody>
+      </p:sp>
+      <p:sp>
+        <p:nvSpPr>
+          <p:cNvPr id="23" name="">
+            <a:extLst xmlns:a="http://schemas.openxmlformats.org/drawingml/2006/main">
+              <a:ext uri="{FF2B5EF4-FFF2-40B4-BE49-F238E27FC236}">
+                <a16:creationId xmlns:a16="http://schemas.microsoft.com/office/drawing/2014/main" id="{56227EE0-B5E6-490E-9158-BBEBE28E922C}"/>
+              </a:ext>
+            </a:extLst>
+          </p:cNvPr>
+          <p:cNvSpPr>
+            <a:spLocks xmlns:a="http://schemas.openxmlformats.org/drawingml/2006/main" noGrp="1"/>
+          </p:cNvSpPr>
+          <p:nvPr/>
+        </p:nvSpPr>
+        <p:spPr>
+          <a:xfrm xmlns:a="http://schemas.openxmlformats.org/drawingml/2006/main">
+            <a:off x="1714500" y="4391025"/>
+            <a:ext cx="9334500" cy="9525"/>
+          </a:xfrm>
+          <a:prstGeom xmlns:a="http://schemas.openxmlformats.org/drawingml/2006/main" prst="rect">
+            <a:avLst/>
+          </a:prstGeom>
+          <a:solidFill xmlns:a="http://schemas.openxmlformats.org/drawingml/2006/main">
+            <a:srgbClr val="D9E0E6"/>
+          </a:solidFill>
+          <a:ln xmlns:a="http://schemas.openxmlformats.org/drawingml/2006/main" w="0">
+            <a:solidFill>
+              <a:srgbClr val="D9E0E6"/>
+            </a:solidFill>
+          </a:ln>
+        </p:spPr>
+      </p:sp>
+      <p:sp>
+        <p:nvSpPr>
+          <p:cNvPr id="24" name="">
+            <a:extLst xmlns:a="http://schemas.openxmlformats.org/drawingml/2006/main">
+              <a:ext uri="{FF2B5EF4-FFF2-40B4-BE49-F238E27FC236}">
+                <a16:creationId xmlns:a16="http://schemas.microsoft.com/office/drawing/2014/main" id="{268D5564-871C-4496-BAF6-EB08549666CF}"/>
+              </a:ext>
+            </a:extLst>
+          </p:cNvPr>
+          <p:cNvSpPr>
+            <a:spLocks xmlns:a="http://schemas.openxmlformats.org/drawingml/2006/main" noGrp="1"/>
+          </p:cNvSpPr>
+          <p:nvPr/>
+        </p:nvSpPr>
+        <p:spPr>
+          <a:xfrm xmlns:a="http://schemas.openxmlformats.org/drawingml/2006/main">
+            <a:off x="1162050" y="4524375"/>
+            <a:ext cx="400050" cy="400050"/>
           </a:xfrm>
           <a:prstGeom xmlns:a="http://schemas.openxmlformats.org/drawingml/2006/main" prst="rect">
             <a:avLst/>
@@ -8705,10 +8911,10 @@
           </a:bodyPr>
           <a:lstStyle xmlns:a="http://schemas.openxmlformats.org/drawingml/2006/main"/>
           <a:p xmlns:a="http://schemas.openxmlformats.org/drawingml/2006/main">
-            <a:pPr algn="l">
-              <a:defRPr sz="1350" b="0">
-                <a:solidFill>
-                  <a:srgbClr val="17253A"/>
+            <a:pPr algn="ctr">
+              <a:defRPr sz="1125" b="1">
+                <a:solidFill>
+                  <a:srgbClr val="2C6E73"/>
                 </a:solidFill>
                 <a:latin typeface="Arial"/>
                 <a:ea typeface="Arial"/>
@@ -8716,37 +8922,37 @@
               </a:defRPr>
             </a:pPr>
             <a:r>
-              <a:rPr sz="1350" b="0">
-                <a:solidFill>
-                  <a:srgbClr val="17253A"/>
+              <a:rPr sz="1125" b="1">
+                <a:solidFill>
+                  <a:srgbClr val="2C6E73"/>
                 </a:solidFill>
                 <a:latin typeface="Arial"/>
                 <a:ea typeface="Arial"/>
                 <a:cs typeface="Arial"/>
               </a:rPr>
-              <a:t>3. 96 ÷ 24 = 4. Write 4; subtract 96; remainder 0.</a:t>
-            </a:r>
-          </a:p>
-        </p:txBody>
-      </p:sp>
-      <p:sp>
-        <p:nvSpPr>
-          <p:cNvPr id="20" name="">
-            <a:extLst xmlns:a="http://schemas.openxmlformats.org/drawingml/2006/main">
-              <a:ext uri="{FF2B5EF4-FFF2-40B4-BE49-F238E27FC236}">
-                <a16:creationId xmlns:a16="http://schemas.microsoft.com/office/drawing/2014/main" id="{2B4BA695-4BD9-4D59-8B46-3CEFE5B9DEE4}"/>
-              </a:ext>
-            </a:extLst>
-          </p:cNvPr>
-          <p:cNvSpPr>
-            <a:spLocks xmlns:a="http://schemas.openxmlformats.org/drawingml/2006/main" noGrp="1"/>
-          </p:cNvSpPr>
-          <p:nvPr/>
-        </p:nvSpPr>
-        <p:spPr>
-          <a:xfrm xmlns:a="http://schemas.openxmlformats.org/drawingml/2006/main">
-            <a:off x="5143500" y="4600575"/>
-            <a:ext cx="6096000" cy="590550"/>
+              <a:t>5</a:t>
+            </a:r>
+          </a:p>
+        </p:txBody>
+      </p:sp>
+      <p:sp>
+        <p:nvSpPr>
+          <p:cNvPr id="25" name="">
+            <a:extLst xmlns:a="http://schemas.openxmlformats.org/drawingml/2006/main">
+              <a:ext uri="{FF2B5EF4-FFF2-40B4-BE49-F238E27FC236}">
+                <a16:creationId xmlns:a16="http://schemas.microsoft.com/office/drawing/2014/main" id="{1CAD760A-CEC1-4D21-8211-627533F9226B}"/>
+              </a:ext>
+            </a:extLst>
+          </p:cNvPr>
+          <p:cNvSpPr>
+            <a:spLocks xmlns:a="http://schemas.openxmlformats.org/drawingml/2006/main" noGrp="1"/>
+          </p:cNvSpPr>
+          <p:nvPr/>
+        </p:nvSpPr>
+        <p:spPr>
+          <a:xfrm xmlns:a="http://schemas.openxmlformats.org/drawingml/2006/main">
+            <a:off x="1714500" y="4438650"/>
+            <a:ext cx="9525000" cy="514350"/>
           </a:xfrm>
           <a:prstGeom xmlns:a="http://schemas.openxmlformats.org/drawingml/2006/main" prst="rect">
             <a:avLst/>
@@ -8763,9 +8969,9 @@
           <a:lstStyle xmlns:a="http://schemas.openxmlformats.org/drawingml/2006/main"/>
           <a:p xmlns:a="http://schemas.openxmlformats.org/drawingml/2006/main">
             <a:pPr algn="l">
-              <a:defRPr sz="1350" b="1">
-                <a:solidFill>
-                  <a:srgbClr val="2F785D"/>
+              <a:defRPr sz="1350" b="0">
+                <a:solidFill>
+                  <a:srgbClr val="17253A"/>
                 </a:solidFill>
                 <a:latin typeface="Arial"/>
                 <a:ea typeface="Arial"/>
@@ -8773,6 +8979,152 @@
               </a:defRPr>
             </a:pPr>
             <a:r>
+              <a:rPr sz="1350" b="0">
+                <a:solidFill>
+                  <a:srgbClr val="17253A"/>
+                </a:solidFill>
+                <a:latin typeface="Arial"/>
+                <a:ea typeface="Arial"/>
+                <a:cs typeface="Arial"/>
+              </a:rPr>
+              <a:t>Quotient = 364</a:t>
+            </a:r>
+          </a:p>
+        </p:txBody>
+      </p:sp>
+      <p:sp>
+        <p:nvSpPr>
+          <p:cNvPr id="26" name="">
+            <a:extLst xmlns:a="http://schemas.openxmlformats.org/drawingml/2006/main">
+              <a:ext uri="{FF2B5EF4-FFF2-40B4-BE49-F238E27FC236}">
+                <a16:creationId xmlns:a16="http://schemas.microsoft.com/office/drawing/2014/main" id="{BD93B6A1-89EB-4682-BD9C-F6CCF79CF89C}"/>
+              </a:ext>
+            </a:extLst>
+          </p:cNvPr>
+          <p:cNvSpPr>
+            <a:spLocks xmlns:a="http://schemas.openxmlformats.org/drawingml/2006/main" noGrp="1"/>
+          </p:cNvSpPr>
+          <p:nvPr/>
+        </p:nvSpPr>
+        <p:spPr>
+          <a:xfrm xmlns:a="http://schemas.openxmlformats.org/drawingml/2006/main">
+            <a:off x="1714500" y="4972050"/>
+            <a:ext cx="9334500" cy="9525"/>
+          </a:xfrm>
+          <a:prstGeom xmlns:a="http://schemas.openxmlformats.org/drawingml/2006/main" prst="rect">
+            <a:avLst/>
+          </a:prstGeom>
+          <a:solidFill xmlns:a="http://schemas.openxmlformats.org/drawingml/2006/main">
+            <a:srgbClr val="D9E0E6"/>
+          </a:solidFill>
+          <a:ln xmlns:a="http://schemas.openxmlformats.org/drawingml/2006/main" w="0">
+            <a:solidFill>
+              <a:srgbClr val="D9E0E6"/>
+            </a:solidFill>
+          </a:ln>
+        </p:spPr>
+      </p:sp>
+      <p:sp>
+        <p:nvSpPr>
+          <p:cNvPr id="27" name="">
+            <a:extLst xmlns:a="http://schemas.openxmlformats.org/drawingml/2006/main">
+              <a:ext uri="{FF2B5EF4-FFF2-40B4-BE49-F238E27FC236}">
+                <a16:creationId xmlns:a16="http://schemas.microsoft.com/office/drawing/2014/main" id="{1BEA39F7-90E0-4982-8EFE-C2EBD2CCB7BB}"/>
+              </a:ext>
+            </a:extLst>
+          </p:cNvPr>
+          <p:cNvSpPr>
+            <a:spLocks xmlns:a="http://schemas.openxmlformats.org/drawingml/2006/main" noGrp="1"/>
+          </p:cNvSpPr>
+          <p:nvPr/>
+        </p:nvSpPr>
+        <p:spPr>
+          <a:xfrm xmlns:a="http://schemas.openxmlformats.org/drawingml/2006/main">
+            <a:off x="1162050" y="5105400"/>
+            <a:ext cx="400050" cy="400050"/>
+          </a:xfrm>
+          <a:prstGeom xmlns:a="http://schemas.openxmlformats.org/drawingml/2006/main" prst="rect">
+            <a:avLst/>
+          </a:prstGeom>
+          <a:noFill xmlns:a="http://schemas.openxmlformats.org/drawingml/2006/main"/>
+          <a:ln xmlns:a="http://schemas.openxmlformats.org/drawingml/2006/main" w="0">
+            <a:noFill/>
+          </a:ln>
+        </p:spPr>
+        <p:txBody>
+          <a:bodyPr xmlns:a="http://schemas.openxmlformats.org/drawingml/2006/main" anchor="ctr">
+            <a:normAutofit fontScale="100000"/>
+          </a:bodyPr>
+          <a:lstStyle xmlns:a="http://schemas.openxmlformats.org/drawingml/2006/main"/>
+          <a:p xmlns:a="http://schemas.openxmlformats.org/drawingml/2006/main">
+            <a:pPr algn="ctr">
+              <a:defRPr sz="1125" b="1">
+                <a:solidFill>
+                  <a:srgbClr val="2F785D"/>
+                </a:solidFill>
+                <a:latin typeface="Arial"/>
+                <a:ea typeface="Arial"/>
+                <a:cs typeface="Arial"/>
+              </a:defRPr>
+            </a:pPr>
+            <a:r>
+              <a:rPr sz="1125" b="1">
+                <a:solidFill>
+                  <a:srgbClr val="2F785D"/>
+                </a:solidFill>
+                <a:latin typeface="Arial"/>
+                <a:ea typeface="Arial"/>
+                <a:cs typeface="Arial"/>
+              </a:rPr>
+              <a:t>6</a:t>
+            </a:r>
+          </a:p>
+        </p:txBody>
+      </p:sp>
+      <p:sp>
+        <p:nvSpPr>
+          <p:cNvPr id="28" name="">
+            <a:extLst xmlns:a="http://schemas.openxmlformats.org/drawingml/2006/main">
+              <a:ext uri="{FF2B5EF4-FFF2-40B4-BE49-F238E27FC236}">
+                <a16:creationId xmlns:a16="http://schemas.microsoft.com/office/drawing/2014/main" id="{9071FA54-C66C-4674-A7ED-A83815DBCC60}"/>
+              </a:ext>
+            </a:extLst>
+          </p:cNvPr>
+          <p:cNvSpPr>
+            <a:spLocks xmlns:a="http://schemas.openxmlformats.org/drawingml/2006/main" noGrp="1"/>
+          </p:cNvSpPr>
+          <p:nvPr/>
+        </p:nvSpPr>
+        <p:spPr>
+          <a:xfrm xmlns:a="http://schemas.openxmlformats.org/drawingml/2006/main">
+            <a:off x="1714500" y="5019675"/>
+            <a:ext cx="9525000" cy="514350"/>
+          </a:xfrm>
+          <a:prstGeom xmlns:a="http://schemas.openxmlformats.org/drawingml/2006/main" prst="rect">
+            <a:avLst/>
+          </a:prstGeom>
+          <a:noFill xmlns:a="http://schemas.openxmlformats.org/drawingml/2006/main"/>
+          <a:ln xmlns:a="http://schemas.openxmlformats.org/drawingml/2006/main" w="0">
+            <a:noFill/>
+          </a:ln>
+        </p:spPr>
+        <p:txBody>
+          <a:bodyPr xmlns:a="http://schemas.openxmlformats.org/drawingml/2006/main" anchor="ctr">
+            <a:normAutofit fontScale="100000"/>
+          </a:bodyPr>
+          <a:lstStyle xmlns:a="http://schemas.openxmlformats.org/drawingml/2006/main"/>
+          <a:p xmlns:a="http://schemas.openxmlformats.org/drawingml/2006/main">
+            <a:pPr algn="l">
+              <a:defRPr sz="1350" b="1">
+                <a:solidFill>
+                  <a:srgbClr val="2F785D"/>
+                </a:solidFill>
+                <a:latin typeface="Arial"/>
+                <a:ea typeface="Arial"/>
+                <a:cs typeface="Arial"/>
+              </a:defRPr>
+            </a:pPr>
+            <a:r>
               <a:rPr sz="1350" b="1">
                 <a:solidFill>
                   <a:srgbClr val="2F785D"/>
@@ -8781,7 +9133,7 @@
                 <a:ea typeface="Arial"/>
                 <a:cs typeface="Arial"/>
               </a:rPr>
-              <a:t>4. Quotient 364. Check: 364 × 24 = 8736.</a:t>
+              <a:t>Check: 364 × 24 = 8,736</a:t>
             </a:r>
           </a:p>
         </p:txBody>
@@ -8789,7 +9141,7 @@
     </p:spTree>
     <p:extLst>
       <p:ext uri="{BB962C8B-B14F-4D97-AF65-F5344CB8AC3E}">
-        <p14:creationId xmlns:p14="http://schemas.microsoft.com/office/powerpoint/2010/main" val="1562425011"/>
+        <p14:creationId xmlns:p14="http://schemas.microsoft.com/office/powerpoint/2010/main" val="1319405342"/>
       </p:ext>
     </p:extLst>
   </p:cSld>
@@ -8917,7 +9269,7 @@
                                           </p:stCondLst>
                                         </p:cTn>
                                         <p:tgtEl>
-                                          <p:spTgt spid="14"/>
+                                          <p:spTgt spid="16"/>
                                         </p:tgtEl>
                                         <p:attrNameLst>
                                           <p:attrName>style.visibility</p:attrName>
@@ -8962,7 +9314,7 @@
                                           </p:stCondLst>
                                         </p:cTn>
                                         <p:tgtEl>
-                                          <p:spTgt spid="15"/>
+                                          <p:spTgt spid="19"/>
                                         </p:tgtEl>
                                         <p:attrNameLst>
                                           <p:attrName>style.visibility</p:attrName>
@@ -9007,7 +9359,7 @@
                                           </p:stCondLst>
                                         </p:cTn>
                                         <p:tgtEl>
-                                          <p:spTgt spid="17"/>
+                                          <p:spTgt spid="22"/>
                                         </p:tgtEl>
                                         <p:attrNameLst>
                                           <p:attrName>style.visibility</p:attrName>
@@ -9052,7 +9404,7 @@
                                           </p:stCondLst>
                                         </p:cTn>
                                         <p:tgtEl>
-                                          <p:spTgt spid="18"/>
+                                          <p:spTgt spid="25"/>
                                         </p:tgtEl>
                                         <p:attrNameLst>
                                           <p:attrName>style.visibility</p:attrName>
@@ -9097,52 +9449,7 @@
                                           </p:stCondLst>
                                         </p:cTn>
                                         <p:tgtEl>
-                                          <p:spTgt spid="19"/>
-                                        </p:tgtEl>
-                                        <p:attrNameLst>
-                                          <p:attrName>style.visibility</p:attrName>
-                                        </p:attrNameLst>
-                                      </p:cBhvr>
-                                      <p:to>
-                                        <p:strVal val="visible"/>
-                                      </p:to>
-                                    </p:set>
-                                  </p:childTnLst>
-                                </p:cTn>
-                              </p:par>
-                            </p:childTnLst>
-                          </p:cTn>
-                        </p:par>
-                      </p:childTnLst>
-                    </p:cTn>
-                  </p:par>
-                  <p:par>
-                    <p:cTn id="31" fill="hold">
-                      <p:stCondLst>
-                        <p:cond delay="indefinite"/>
-                      </p:stCondLst>
-                      <p:childTnLst>
-                        <p:par>
-                          <p:cTn id="32" fill="hold">
-                            <p:stCondLst>
-                              <p:cond delay="0"/>
-                            </p:stCondLst>
-                            <p:childTnLst>
-                              <p:par>
-                                <p:cTn id="33" presetID="1" presetClass="entr" presetSubtype="0" fill="hold" grpId="0" nodeType="clickEffect">
-                                  <p:stCondLst>
-                                    <p:cond delay="0"/>
-                                  </p:stCondLst>
-                                  <p:childTnLst>
-                                    <p:set>
-                                      <p:cBhvr>
-                                        <p:cTn id="34" dur="1" fill="hold">
-                                          <p:stCondLst>
-                                            <p:cond delay="0"/>
-                                          </p:stCondLst>
-                                        </p:cTn>
-                                        <p:tgtEl>
-                                          <p:spTgt spid="20"/>
+                                          <p:spTgt spid="28"/>
                                         </p:tgtEl>
                                         <p:attrNameLst>
                                           <p:attrName>style.visibility</p:attrName>
@@ -9185,12 +9492,11 @@
     <p:bldLst>
       <p:bldP spid="10" grpId="0"/>
       <p:bldP spid="13" grpId="0"/>
-      <p:bldP spid="14" grpId="0"/>
-      <p:bldP spid="15" grpId="0"/>
-      <p:bldP spid="17" grpId="0"/>
-      <p:bldP spid="18" grpId="0"/>
+      <p:bldP spid="16" grpId="0"/>
       <p:bldP spid="19" grpId="0"/>
-      <p:bldP spid="20" grpId="0"/>
+      <p:bldP spid="22" grpId="0"/>
+      <p:bldP spid="25" grpId="0"/>
+      <p:bldP spid="28" grpId="0"/>
     </p:bldLst>
   </p:timing>
 </p:sld>
@@ -9220,7 +9526,7 @@
           <p:cNvPr id="15" name="">
             <a:extLst xmlns:a="http://schemas.openxmlformats.org/drawingml/2006/main">
               <a:ext uri="{FF2B5EF4-FFF2-40B4-BE49-F238E27FC236}">
-                <a16:creationId xmlns:a16="http://schemas.microsoft.com/office/drawing/2014/main" id="{869A4B85-727E-410A-A2E5-64554A20D9E3}"/>
+                <a16:creationId xmlns:a16="http://schemas.microsoft.com/office/drawing/2014/main" id="{FF155D0E-25DA-4C60-A9C5-AAADFD39E64C}"/>
               </a:ext>
             </a:extLst>
           </p:cNvPr>
@@ -9252,7 +9558,7 @@
           <p:cNvPr id="2" name="">
             <a:extLst xmlns:a="http://schemas.openxmlformats.org/drawingml/2006/main">
               <a:ext uri="{FF2B5EF4-FFF2-40B4-BE49-F238E27FC236}">
-                <a16:creationId xmlns:a16="http://schemas.microsoft.com/office/drawing/2014/main" id="{E199F52A-4CFE-42A9-8599-B3AD3B199C33}"/>
+                <a16:creationId xmlns:a16="http://schemas.microsoft.com/office/drawing/2014/main" id="{9D675EB6-B72A-4F3F-9F9F-E1B27F29D50E}"/>
               </a:ext>
             </a:extLst>
           </p:cNvPr>
@@ -9309,7 +9615,7 @@
           <p:cNvPr id="3" name="">
             <a:extLst xmlns:a="http://schemas.openxmlformats.org/drawingml/2006/main">
               <a:ext uri="{FF2B5EF4-FFF2-40B4-BE49-F238E27FC236}">
-                <a16:creationId xmlns:a16="http://schemas.microsoft.com/office/drawing/2014/main" id="{5DE4AE69-16E0-4894-B2B6-9D0C59B3FE16}"/>
+                <a16:creationId xmlns:a16="http://schemas.microsoft.com/office/drawing/2014/main" id="{36CE3C9E-E0AC-41C5-BEC1-9D6D24441BDB}"/>
               </a:ext>
             </a:extLst>
           </p:cNvPr>
@@ -9341,7 +9647,7 @@
           <p:cNvPr id="4" name="">
             <a:extLst xmlns:a="http://schemas.openxmlformats.org/drawingml/2006/main">
               <a:ext uri="{FF2B5EF4-FFF2-40B4-BE49-F238E27FC236}">
-                <a16:creationId xmlns:a16="http://schemas.microsoft.com/office/drawing/2014/main" id="{146363C2-5C9C-4C37-84C9-B29E7E679D18}"/>
+                <a16:creationId xmlns:a16="http://schemas.microsoft.com/office/drawing/2014/main" id="{71835550-452C-4773-B1AE-966396F5BA30}"/>
               </a:ext>
             </a:extLst>
           </p:cNvPr>
@@ -9398,7 +9704,7 @@
           <p:cNvPr id="5" name="">
             <a:extLst xmlns:a="http://schemas.openxmlformats.org/drawingml/2006/main">
               <a:ext uri="{FF2B5EF4-FFF2-40B4-BE49-F238E27FC236}">
-                <a16:creationId xmlns:a16="http://schemas.microsoft.com/office/drawing/2014/main" id="{B884375E-797E-4C17-9D8E-1748957AF533}"/>
+                <a16:creationId xmlns:a16="http://schemas.microsoft.com/office/drawing/2014/main" id="{FB684D6B-8D3F-4D5F-8B05-53F313648BA9}"/>
               </a:ext>
             </a:extLst>
           </p:cNvPr>
@@ -9455,7 +9761,7 @@
           <p:cNvPr id="6" name="">
             <a:extLst xmlns:a="http://schemas.openxmlformats.org/drawingml/2006/main">
               <a:ext uri="{FF2B5EF4-FFF2-40B4-BE49-F238E27FC236}">
-                <a16:creationId xmlns:a16="http://schemas.microsoft.com/office/drawing/2014/main" id="{4F50D406-75C3-4029-805E-DE439A37D6B6}"/>
+                <a16:creationId xmlns:a16="http://schemas.microsoft.com/office/drawing/2014/main" id="{5EECBCE1-1D54-4A04-A932-497AA4AC6F0D}"/>
               </a:ext>
             </a:extLst>
           </p:cNvPr>
@@ -9512,7 +9818,7 @@
           <p:cNvPr id="7" name="">
             <a:extLst xmlns:a="http://schemas.openxmlformats.org/drawingml/2006/main">
               <a:ext uri="{FF2B5EF4-FFF2-40B4-BE49-F238E27FC236}">
-                <a16:creationId xmlns:a16="http://schemas.microsoft.com/office/drawing/2014/main" id="{824A396C-7F8F-4042-B972-708AEA4810B0}"/>
+                <a16:creationId xmlns:a16="http://schemas.microsoft.com/office/drawing/2014/main" id="{6A89F85B-1F89-4225-97C8-AD2507ED8C8E}"/>
               </a:ext>
             </a:extLst>
           </p:cNvPr>
@@ -9544,7 +9850,7 @@
           <p:cNvPr id="8" name="">
             <a:extLst xmlns:a="http://schemas.openxmlformats.org/drawingml/2006/main">
               <a:ext uri="{FF2B5EF4-FFF2-40B4-BE49-F238E27FC236}">
-                <a16:creationId xmlns:a16="http://schemas.microsoft.com/office/drawing/2014/main" id="{5517B6CE-3E3D-4348-A9FE-297A5626C9EB}"/>
+                <a16:creationId xmlns:a16="http://schemas.microsoft.com/office/drawing/2014/main" id="{662B18A4-123D-42FE-A157-DC2EC02C161D}"/>
               </a:ext>
             </a:extLst>
           </p:cNvPr>
@@ -9601,7 +9907,7 @@
           <p:cNvPr id="9" name="">
             <a:extLst xmlns:a="http://schemas.openxmlformats.org/drawingml/2006/main">
               <a:ext uri="{FF2B5EF4-FFF2-40B4-BE49-F238E27FC236}">
-                <a16:creationId xmlns:a16="http://schemas.microsoft.com/office/drawing/2014/main" id="{8114F642-B4D6-431F-B84E-CCD2D84632C8}"/>
+                <a16:creationId xmlns:a16="http://schemas.microsoft.com/office/drawing/2014/main" id="{DEFA75AB-6D9F-4C6D-A3C5-14502E51D3F1}"/>
               </a:ext>
             </a:extLst>
           </p:cNvPr>
@@ -9658,7 +9964,7 @@
           <p:cNvPr id="10" name="">
             <a:extLst xmlns:a="http://schemas.openxmlformats.org/drawingml/2006/main">
               <a:ext uri="{FF2B5EF4-FFF2-40B4-BE49-F238E27FC236}">
-                <a16:creationId xmlns:a16="http://schemas.microsoft.com/office/drawing/2014/main" id="{DC8F2E36-A689-4397-AC33-72B619BACED6}"/>
+                <a16:creationId xmlns:a16="http://schemas.microsoft.com/office/drawing/2014/main" id="{427468F4-8E31-4FDD-8C2A-F2F98403B029}"/>
               </a:ext>
             </a:extLst>
           </p:cNvPr>
@@ -9715,7 +10021,7 @@
           <p:cNvPr id="11" name="">
             <a:extLst xmlns:a="http://schemas.openxmlformats.org/drawingml/2006/main">
               <a:ext uri="{FF2B5EF4-FFF2-40B4-BE49-F238E27FC236}">
-                <a16:creationId xmlns:a16="http://schemas.microsoft.com/office/drawing/2014/main" id="{BC3A7825-99E0-49DA-89D6-8748428430BD}"/>
+                <a16:creationId xmlns:a16="http://schemas.microsoft.com/office/drawing/2014/main" id="{F4F2218B-0578-47DF-9EC3-00714C1306C2}"/>
               </a:ext>
             </a:extLst>
           </p:cNvPr>
@@ -9772,7 +10078,7 @@
           <p:cNvPr id="12" name="">
             <a:extLst xmlns:a="http://schemas.openxmlformats.org/drawingml/2006/main">
               <a:ext uri="{FF2B5EF4-FFF2-40B4-BE49-F238E27FC236}">
-                <a16:creationId xmlns:a16="http://schemas.microsoft.com/office/drawing/2014/main" id="{7AA11C74-B0B5-4497-AC29-81C4DEF810D9}"/>
+                <a16:creationId xmlns:a16="http://schemas.microsoft.com/office/drawing/2014/main" id="{4CF160AF-217E-4459-A179-D7F8505E1359}"/>
               </a:ext>
             </a:extLst>
           </p:cNvPr>
@@ -9804,7 +10110,7 @@
           <p:cNvPr id="13" name="">
             <a:extLst xmlns:a="http://schemas.openxmlformats.org/drawingml/2006/main">
               <a:ext uri="{FF2B5EF4-FFF2-40B4-BE49-F238E27FC236}">
-                <a16:creationId xmlns:a16="http://schemas.microsoft.com/office/drawing/2014/main" id="{ABCF91C2-E716-4BDF-91C7-783EEE6A3D20}"/>
+                <a16:creationId xmlns:a16="http://schemas.microsoft.com/office/drawing/2014/main" id="{D3D9A1E7-42B0-41EF-B300-A14B2E93AF59}"/>
               </a:ext>
             </a:extLst>
           </p:cNvPr>
@@ -9861,7 +10167,7 @@
           <p:cNvPr id="14" name="">
             <a:extLst xmlns:a="http://schemas.openxmlformats.org/drawingml/2006/main">
               <a:ext uri="{FF2B5EF4-FFF2-40B4-BE49-F238E27FC236}">
-                <a16:creationId xmlns:a16="http://schemas.microsoft.com/office/drawing/2014/main" id="{2A2EF8B7-3D9C-4BC2-92E9-A9987423F016}"/>
+                <a16:creationId xmlns:a16="http://schemas.microsoft.com/office/drawing/2014/main" id="{A6F066B8-7544-4D30-AA01-F669CFFB90D8}"/>
               </a:ext>
             </a:extLst>
           </p:cNvPr>
@@ -9916,7 +10222,7 @@
     </p:spTree>
     <p:extLst>
       <p:ext uri="{BB962C8B-B14F-4D97-AF65-F5344CB8AC3E}">
-        <p14:creationId xmlns:p14="http://schemas.microsoft.com/office/powerpoint/2010/main" val="2062762480"/>
+        <p14:creationId xmlns:p14="http://schemas.microsoft.com/office/powerpoint/2010/main" val="784111261"/>
       </p:ext>
     </p:extLst>
   </p:cSld>
@@ -10117,7 +10423,7 @@
           <p:cNvPr id="16" name="">
             <a:extLst xmlns:a="http://schemas.openxmlformats.org/drawingml/2006/main">
               <a:ext uri="{FF2B5EF4-FFF2-40B4-BE49-F238E27FC236}">
-                <a16:creationId xmlns:a16="http://schemas.microsoft.com/office/drawing/2014/main" id="{4DB72306-15B7-4DE1-90A9-4DC8CF39E8D4}"/>
+                <a16:creationId xmlns:a16="http://schemas.microsoft.com/office/drawing/2014/main" id="{8541A8AE-C9DD-4C46-8310-376E23B2F0AD}"/>
               </a:ext>
             </a:extLst>
           </p:cNvPr>
@@ -10149,7 +10455,7 @@
           <p:cNvPr id="2" name="">
             <a:extLst xmlns:a="http://schemas.openxmlformats.org/drawingml/2006/main">
               <a:ext uri="{FF2B5EF4-FFF2-40B4-BE49-F238E27FC236}">
-                <a16:creationId xmlns:a16="http://schemas.microsoft.com/office/drawing/2014/main" id="{078A0596-7502-4B98-B185-0CDB3789E8F2}"/>
+                <a16:creationId xmlns:a16="http://schemas.microsoft.com/office/drawing/2014/main" id="{4B60DBD8-DA75-417C-91F4-387A72232BFE}"/>
               </a:ext>
             </a:extLst>
           </p:cNvPr>
@@ -10206,7 +10512,7 @@
           <p:cNvPr id="3" name="">
             <a:extLst xmlns:a="http://schemas.openxmlformats.org/drawingml/2006/main">
               <a:ext uri="{FF2B5EF4-FFF2-40B4-BE49-F238E27FC236}">
-                <a16:creationId xmlns:a16="http://schemas.microsoft.com/office/drawing/2014/main" id="{7EADEFCB-954B-4406-95A0-E82835E0FD9A}"/>
+                <a16:creationId xmlns:a16="http://schemas.microsoft.com/office/drawing/2014/main" id="{EB8A7ED4-8CD8-4180-B9F7-A7656CFD28F8}"/>
               </a:ext>
             </a:extLst>
           </p:cNvPr>
@@ -10238,7 +10544,7 @@
           <p:cNvPr id="4" name="">
             <a:extLst xmlns:a="http://schemas.openxmlformats.org/drawingml/2006/main">
               <a:ext uri="{FF2B5EF4-FFF2-40B4-BE49-F238E27FC236}">
-                <a16:creationId xmlns:a16="http://schemas.microsoft.com/office/drawing/2014/main" id="{ED6BB638-C5C7-4B37-99A0-C723DE9CB790}"/>
+                <a16:creationId xmlns:a16="http://schemas.microsoft.com/office/drawing/2014/main" id="{791D5A6C-E089-431E-A02F-ABC5054FBAE2}"/>
               </a:ext>
             </a:extLst>
           </p:cNvPr>
@@ -10295,7 +10601,7 @@
           <p:cNvPr id="5" name="">
             <a:extLst xmlns:a="http://schemas.openxmlformats.org/drawingml/2006/main">
               <a:ext uri="{FF2B5EF4-FFF2-40B4-BE49-F238E27FC236}">
-                <a16:creationId xmlns:a16="http://schemas.microsoft.com/office/drawing/2014/main" id="{5A715BFE-4637-4321-9E04-BA207E9334C6}"/>
+                <a16:creationId xmlns:a16="http://schemas.microsoft.com/office/drawing/2014/main" id="{91EA52D0-637A-4238-9E72-44B434BD0697}"/>
               </a:ext>
             </a:extLst>
           </p:cNvPr>
@@ -10352,7 +10658,7 @@
           <p:cNvPr id="6" name="">
             <a:extLst xmlns:a="http://schemas.openxmlformats.org/drawingml/2006/main">
               <a:ext uri="{FF2B5EF4-FFF2-40B4-BE49-F238E27FC236}">
-                <a16:creationId xmlns:a16="http://schemas.microsoft.com/office/drawing/2014/main" id="{A1063A84-583D-41D8-846B-F3406B95BCD3}"/>
+                <a16:creationId xmlns:a16="http://schemas.microsoft.com/office/drawing/2014/main" id="{21837B01-401F-47A5-A3D0-A6A4FB1431FF}"/>
               </a:ext>
             </a:extLst>
           </p:cNvPr>
@@ -10409,7 +10715,7 @@
           <p:cNvPr id="7" name="">
             <a:extLst xmlns:a="http://schemas.openxmlformats.org/drawingml/2006/main">
               <a:ext uri="{FF2B5EF4-FFF2-40B4-BE49-F238E27FC236}">
-                <a16:creationId xmlns:a16="http://schemas.microsoft.com/office/drawing/2014/main" id="{907B7531-EF55-45DE-9587-9753A37CE001}"/>
+                <a16:creationId xmlns:a16="http://schemas.microsoft.com/office/drawing/2014/main" id="{CD462EB6-8D84-46E3-A003-CB75D5C8469A}"/>
               </a:ext>
             </a:extLst>
           </p:cNvPr>
@@ -10441,7 +10747,7 @@
           <p:cNvPr id="8" name="">
             <a:extLst xmlns:a="http://schemas.openxmlformats.org/drawingml/2006/main">
               <a:ext uri="{FF2B5EF4-FFF2-40B4-BE49-F238E27FC236}">
-                <a16:creationId xmlns:a16="http://schemas.microsoft.com/office/drawing/2014/main" id="{3EEABAB3-1D80-4BE4-8C92-41942261C461}"/>
+                <a16:creationId xmlns:a16="http://schemas.microsoft.com/office/drawing/2014/main" id="{573A2844-ADC4-4B05-B0D8-938C42571638}"/>
               </a:ext>
             </a:extLst>
           </p:cNvPr>
@@ -10498,7 +10804,7 @@
           <p:cNvPr id="9" name="">
             <a:extLst xmlns:a="http://schemas.openxmlformats.org/drawingml/2006/main">
               <a:ext uri="{FF2B5EF4-FFF2-40B4-BE49-F238E27FC236}">
-                <a16:creationId xmlns:a16="http://schemas.microsoft.com/office/drawing/2014/main" id="{438602EC-4A59-4629-A6C5-60C98DEF43D3}"/>
+                <a16:creationId xmlns:a16="http://schemas.microsoft.com/office/drawing/2014/main" id="{24D38B4A-EC38-49BC-AD45-A9AC72F6C2F3}"/>
               </a:ext>
             </a:extLst>
           </p:cNvPr>
@@ -10555,7 +10861,7 @@
           <p:cNvPr id="10" name="">
             <a:extLst xmlns:a="http://schemas.openxmlformats.org/drawingml/2006/main">
               <a:ext uri="{FF2B5EF4-FFF2-40B4-BE49-F238E27FC236}">
-                <a16:creationId xmlns:a16="http://schemas.microsoft.com/office/drawing/2014/main" id="{2B67821F-0717-497D-9FB5-A6EA560A68B5}"/>
+                <a16:creationId xmlns:a16="http://schemas.microsoft.com/office/drawing/2014/main" id="{8F8E2BD8-B4D7-43FF-9D31-2D24C533015D}"/>
               </a:ext>
             </a:extLst>
           </p:cNvPr>
@@ -10612,7 +10918,7 @@
           <p:cNvPr id="11" name="">
             <a:extLst xmlns:a="http://schemas.openxmlformats.org/drawingml/2006/main">
               <a:ext uri="{FF2B5EF4-FFF2-40B4-BE49-F238E27FC236}">
-                <a16:creationId xmlns:a16="http://schemas.microsoft.com/office/drawing/2014/main" id="{DF10D3D6-C552-4A18-B0D3-A62C1EF985E5}"/>
+                <a16:creationId xmlns:a16="http://schemas.microsoft.com/office/drawing/2014/main" id="{70A11B8E-1A9B-44A5-9CE7-8E6A3588BD3A}"/>
               </a:ext>
             </a:extLst>
           </p:cNvPr>
@@ -10669,7 +10975,7 @@
           <p:cNvPr id="12" name="">
             <a:extLst xmlns:a="http://schemas.openxmlformats.org/drawingml/2006/main">
               <a:ext uri="{FF2B5EF4-FFF2-40B4-BE49-F238E27FC236}">
-                <a16:creationId xmlns:a16="http://schemas.microsoft.com/office/drawing/2014/main" id="{ECB29A81-921E-4E49-B123-33563D6AB9CC}"/>
+                <a16:creationId xmlns:a16="http://schemas.microsoft.com/office/drawing/2014/main" id="{50A7F42E-F88E-4E45-A520-68BD449EEB81}"/>
               </a:ext>
             </a:extLst>
           </p:cNvPr>
@@ -10726,7 +11032,7 @@
           <p:cNvPr id="13" name="">
             <a:extLst xmlns:a="http://schemas.openxmlformats.org/drawingml/2006/main">
               <a:ext uri="{FF2B5EF4-FFF2-40B4-BE49-F238E27FC236}">
-                <a16:creationId xmlns:a16="http://schemas.microsoft.com/office/drawing/2014/main" id="{7223CB70-002F-4DC9-ABED-80B97D6197E9}"/>
+                <a16:creationId xmlns:a16="http://schemas.microsoft.com/office/drawing/2014/main" id="{C38AC500-D5A3-4C69-8D56-AB5AA7E71ECB}"/>
               </a:ext>
             </a:extLst>
           </p:cNvPr>
@@ -10783,7 +11089,7 @@
           <p:cNvPr id="14" name="">
             <a:extLst xmlns:a="http://schemas.openxmlformats.org/drawingml/2006/main">
               <a:ext uri="{FF2B5EF4-FFF2-40B4-BE49-F238E27FC236}">
-                <a16:creationId xmlns:a16="http://schemas.microsoft.com/office/drawing/2014/main" id="{325AB2D5-0C18-4CE5-81C2-C51672373290}"/>
+                <a16:creationId xmlns:a16="http://schemas.microsoft.com/office/drawing/2014/main" id="{F28A35C6-EC12-4F83-894B-543844FDFC87}"/>
               </a:ext>
             </a:extLst>
           </p:cNvPr>
@@ -10840,7 +11146,7 @@
           <p:cNvPr id="15" name="">
             <a:extLst xmlns:a="http://schemas.openxmlformats.org/drawingml/2006/main">
               <a:ext uri="{FF2B5EF4-FFF2-40B4-BE49-F238E27FC236}">
-                <a16:creationId xmlns:a16="http://schemas.microsoft.com/office/drawing/2014/main" id="{CFFE5E5E-7C26-44B6-BF17-F6239F9C6CF7}"/>
+                <a16:creationId xmlns:a16="http://schemas.microsoft.com/office/drawing/2014/main" id="{17588889-15CF-4CD7-A3E4-126B36DCCEFF}"/>
               </a:ext>
             </a:extLst>
           </p:cNvPr>
@@ -10895,7 +11201,7 @@
     </p:spTree>
     <p:extLst>
       <p:ext uri="{BB962C8B-B14F-4D97-AF65-F5344CB8AC3E}">
-        <p14:creationId xmlns:p14="http://schemas.microsoft.com/office/powerpoint/2010/main" val="557001997"/>
+        <p14:creationId xmlns:p14="http://schemas.microsoft.com/office/powerpoint/2010/main" val="1765057297"/>
       </p:ext>
     </p:extLst>
   </p:cSld>
@@ -11050,7 +11356,7 @@
           <p:cNvPr id="16" name="">
             <a:extLst xmlns:a="http://schemas.openxmlformats.org/drawingml/2006/main">
               <a:ext uri="{FF2B5EF4-FFF2-40B4-BE49-F238E27FC236}">
-                <a16:creationId xmlns:a16="http://schemas.microsoft.com/office/drawing/2014/main" id="{1F259E6D-49AC-4478-9C67-7BC17A659CFB}"/>
+                <a16:creationId xmlns:a16="http://schemas.microsoft.com/office/drawing/2014/main" id="{BB0215D3-77FC-490E-B5B5-35763518A79E}"/>
               </a:ext>
             </a:extLst>
           </p:cNvPr>
@@ -11082,7 +11388,7 @@
           <p:cNvPr id="2" name="">
             <a:extLst xmlns:a="http://schemas.openxmlformats.org/drawingml/2006/main">
               <a:ext uri="{FF2B5EF4-FFF2-40B4-BE49-F238E27FC236}">
-                <a16:creationId xmlns:a16="http://schemas.microsoft.com/office/drawing/2014/main" id="{16522BD9-48F5-4A88-BD27-14BF01E585D9}"/>
+                <a16:creationId xmlns:a16="http://schemas.microsoft.com/office/drawing/2014/main" id="{C2241497-38F3-4757-9506-A4D2805765FB}"/>
               </a:ext>
             </a:extLst>
           </p:cNvPr>
@@ -11139,7 +11445,7 @@
           <p:cNvPr id="3" name="">
             <a:extLst xmlns:a="http://schemas.openxmlformats.org/drawingml/2006/main">
               <a:ext uri="{FF2B5EF4-FFF2-40B4-BE49-F238E27FC236}">
-                <a16:creationId xmlns:a16="http://schemas.microsoft.com/office/drawing/2014/main" id="{4F7752B3-FE6B-465C-A18D-2972F502CBBF}"/>
+                <a16:creationId xmlns:a16="http://schemas.microsoft.com/office/drawing/2014/main" id="{FD051A9E-C25B-45A7-AD98-7836BF52E10D}"/>
               </a:ext>
             </a:extLst>
           </p:cNvPr>
@@ -11171,7 +11477,7 @@
           <p:cNvPr id="4" name="">
             <a:extLst xmlns:a="http://schemas.openxmlformats.org/drawingml/2006/main">
               <a:ext uri="{FF2B5EF4-FFF2-40B4-BE49-F238E27FC236}">
-                <a16:creationId xmlns:a16="http://schemas.microsoft.com/office/drawing/2014/main" id="{11FB27FD-6CAA-4549-8F92-68D485489AA4}"/>
+                <a16:creationId xmlns:a16="http://schemas.microsoft.com/office/drawing/2014/main" id="{6D906B3C-5A86-476D-83F0-A55C0FE3662E}"/>
               </a:ext>
             </a:extLst>
           </p:cNvPr>
@@ -11228,7 +11534,7 @@
           <p:cNvPr id="5" name="">
             <a:extLst xmlns:a="http://schemas.openxmlformats.org/drawingml/2006/main">
               <a:ext uri="{FF2B5EF4-FFF2-40B4-BE49-F238E27FC236}">
-                <a16:creationId xmlns:a16="http://schemas.microsoft.com/office/drawing/2014/main" id="{953C3B08-A454-4D7B-A7BA-2411FA6B12CC}"/>
+                <a16:creationId xmlns:a16="http://schemas.microsoft.com/office/drawing/2014/main" id="{66792348-959F-48F7-9A80-2A086B29487B}"/>
               </a:ext>
             </a:extLst>
           </p:cNvPr>
@@ -11285,7 +11591,7 @@
           <p:cNvPr id="6" name="">
             <a:extLst xmlns:a="http://schemas.openxmlformats.org/drawingml/2006/main">
               <a:ext uri="{FF2B5EF4-FFF2-40B4-BE49-F238E27FC236}">
-                <a16:creationId xmlns:a16="http://schemas.microsoft.com/office/drawing/2014/main" id="{1A6120FC-DCBB-4EE8-9F19-62C282F2686D}"/>
+                <a16:creationId xmlns:a16="http://schemas.microsoft.com/office/drawing/2014/main" id="{2F5ED1A3-014A-4803-99E6-8AD767157ED3}"/>
               </a:ext>
             </a:extLst>
           </p:cNvPr>
@@ -11342,7 +11648,7 @@
           <p:cNvPr id="7" name="">
             <a:extLst xmlns:a="http://schemas.openxmlformats.org/drawingml/2006/main">
               <a:ext uri="{FF2B5EF4-FFF2-40B4-BE49-F238E27FC236}">
-                <a16:creationId xmlns:a16="http://schemas.microsoft.com/office/drawing/2014/main" id="{899D22A0-F489-4731-B4A6-DD911864D9C1}"/>
+                <a16:creationId xmlns:a16="http://schemas.microsoft.com/office/drawing/2014/main" id="{5C83797F-43EB-430C-9386-E5B6114B57E3}"/>
               </a:ext>
             </a:extLst>
           </p:cNvPr>
@@ -11374,7 +11680,7 @@
           <p:cNvPr id="8" name="">
             <a:extLst xmlns:a="http://schemas.openxmlformats.org/drawingml/2006/main">
               <a:ext uri="{FF2B5EF4-FFF2-40B4-BE49-F238E27FC236}">
-                <a16:creationId xmlns:a16="http://schemas.microsoft.com/office/drawing/2014/main" id="{0F72F1D6-763F-4318-9806-578D0F43966E}"/>
+                <a16:creationId xmlns:a16="http://schemas.microsoft.com/office/drawing/2014/main" id="{6183D1C7-9A24-4FBD-B05E-62F57804E39A}"/>
               </a:ext>
             </a:extLst>
           </p:cNvPr>
@@ -11431,7 +11737,7 @@
           <p:cNvPr id="9" name="">
             <a:extLst xmlns:a="http://schemas.openxmlformats.org/drawingml/2006/main">
               <a:ext uri="{FF2B5EF4-FFF2-40B4-BE49-F238E27FC236}">
-                <a16:creationId xmlns:a16="http://schemas.microsoft.com/office/drawing/2014/main" id="{EFC62B24-4680-44A8-984D-DB7ABAE7F39C}"/>
+                <a16:creationId xmlns:a16="http://schemas.microsoft.com/office/drawing/2014/main" id="{755BE9CA-CE39-4A9E-A18C-0DC95825CD84}"/>
               </a:ext>
             </a:extLst>
           </p:cNvPr>
@@ -11492,7 +11798,7 @@
           <p:nvPr/>
         </p:nvPicPr>
         <p:blipFill>
-          <a:blip xmlns:r="http://schemas.openxmlformats.org/officeDocument/2006/relationships" xmlns:a="http://schemas.openxmlformats.org/drawingml/2006/main" r:embed="Raff2acad2b234014"/>
+          <a:blip xmlns:r="http://schemas.openxmlformats.org/officeDocument/2006/relationships" xmlns:a="http://schemas.openxmlformats.org/drawingml/2006/main" r:embed="Rde0d5ab23bbf47ad"/>
           <a:stretch xmlns:a="http://schemas.openxmlformats.org/drawingml/2006/main"/>
         </p:blipFill>
         <p:spPr>
@@ -11510,7 +11816,7 @@
           <p:cNvPr id="11" name="">
             <a:extLst xmlns:a="http://schemas.openxmlformats.org/drawingml/2006/main">
               <a:ext uri="{FF2B5EF4-FFF2-40B4-BE49-F238E27FC236}">
-                <a16:creationId xmlns:a16="http://schemas.microsoft.com/office/drawing/2014/main" id="{4875CA26-C21B-4231-940B-1FBB4B4C3B9A}"/>
+                <a16:creationId xmlns:a16="http://schemas.microsoft.com/office/drawing/2014/main" id="{132536DB-53FD-42E9-A07E-A1079604A4ED}"/>
               </a:ext>
             </a:extLst>
           </p:cNvPr>
@@ -11567,7 +11873,7 @@
           <p:cNvPr id="12" name="">
             <a:extLst xmlns:a="http://schemas.openxmlformats.org/drawingml/2006/main">
               <a:ext uri="{FF2B5EF4-FFF2-40B4-BE49-F238E27FC236}">
-                <a16:creationId xmlns:a16="http://schemas.microsoft.com/office/drawing/2014/main" id="{0C31C8D5-B801-4C28-AF81-9F808F2E9E41}"/>
+                <a16:creationId xmlns:a16="http://schemas.microsoft.com/office/drawing/2014/main" id="{6E0BF7FA-5750-40A0-AA9A-9116DA52BC43}"/>
               </a:ext>
             </a:extLst>
           </p:cNvPr>
@@ -11624,7 +11930,7 @@
           <p:cNvPr id="13" name="">
             <a:extLst xmlns:a="http://schemas.openxmlformats.org/drawingml/2006/main">
               <a:ext uri="{FF2B5EF4-FFF2-40B4-BE49-F238E27FC236}">
-                <a16:creationId xmlns:a16="http://schemas.microsoft.com/office/drawing/2014/main" id="{05799CB8-24B6-460A-BBD4-1078E2480DE4}"/>
+                <a16:creationId xmlns:a16="http://schemas.microsoft.com/office/drawing/2014/main" id="{DFCCA265-7E80-49CC-9DE5-DEED6A7343E7}"/>
               </a:ext>
             </a:extLst>
           </p:cNvPr>
@@ -11656,7 +11962,7 @@
           <p:cNvPr id="14" name="">
             <a:extLst xmlns:a="http://schemas.openxmlformats.org/drawingml/2006/main">
               <a:ext uri="{FF2B5EF4-FFF2-40B4-BE49-F238E27FC236}">
-                <a16:creationId xmlns:a16="http://schemas.microsoft.com/office/drawing/2014/main" id="{97C6D317-3F40-414C-ABD4-169DA632235B}"/>
+                <a16:creationId xmlns:a16="http://schemas.microsoft.com/office/drawing/2014/main" id="{106F947E-1CDF-4B1E-9DBE-709507AC4DF5}"/>
               </a:ext>
             </a:extLst>
           </p:cNvPr>
@@ -11713,7 +12019,7 @@
           <p:cNvPr id="15" name="">
             <a:extLst xmlns:a="http://schemas.openxmlformats.org/drawingml/2006/main">
               <a:ext uri="{FF2B5EF4-FFF2-40B4-BE49-F238E27FC236}">
-                <a16:creationId xmlns:a16="http://schemas.microsoft.com/office/drawing/2014/main" id="{051F0BAB-D89F-440B-9E70-E9D656823A00}"/>
+                <a16:creationId xmlns:a16="http://schemas.microsoft.com/office/drawing/2014/main" id="{89381E30-E1EB-43BB-B6A8-3B9E4F6BD709}"/>
               </a:ext>
             </a:extLst>
           </p:cNvPr>
@@ -11768,7 +12074,7 @@
     </p:spTree>
     <p:extLst>
       <p:ext uri="{BB962C8B-B14F-4D97-AF65-F5344CB8AC3E}">
-        <p14:creationId xmlns:p14="http://schemas.microsoft.com/office/powerpoint/2010/main" val="129618616"/>
+        <p14:creationId xmlns:p14="http://schemas.microsoft.com/office/powerpoint/2010/main" val="1199562753"/>
       </p:ext>
     </p:extLst>
   </p:cSld>
@@ -11923,7 +12229,7 @@
           <p:cNvPr id="23" name="">
             <a:extLst xmlns:a="http://schemas.openxmlformats.org/drawingml/2006/main">
               <a:ext uri="{FF2B5EF4-FFF2-40B4-BE49-F238E27FC236}">
-                <a16:creationId xmlns:a16="http://schemas.microsoft.com/office/drawing/2014/main" id="{63C6E57B-BCBB-4A47-B899-64EF3D32963B}"/>
+                <a16:creationId xmlns:a16="http://schemas.microsoft.com/office/drawing/2014/main" id="{F987B465-0C29-4365-861C-028754E19DFA}"/>
               </a:ext>
             </a:extLst>
           </p:cNvPr>
@@ -11955,7 +12261,7 @@
           <p:cNvPr id="2" name="">
             <a:extLst xmlns:a="http://schemas.openxmlformats.org/drawingml/2006/main">
               <a:ext uri="{FF2B5EF4-FFF2-40B4-BE49-F238E27FC236}">
-                <a16:creationId xmlns:a16="http://schemas.microsoft.com/office/drawing/2014/main" id="{980CED03-A87E-4A74-B7D8-5AD8C8E02F8E}"/>
+                <a16:creationId xmlns:a16="http://schemas.microsoft.com/office/drawing/2014/main" id="{F0342923-DBAF-473C-8532-542543A41F40}"/>
               </a:ext>
             </a:extLst>
           </p:cNvPr>
@@ -12012,7 +12318,7 @@
           <p:cNvPr id="3" name="">
             <a:extLst xmlns:a="http://schemas.openxmlformats.org/drawingml/2006/main">
               <a:ext uri="{FF2B5EF4-FFF2-40B4-BE49-F238E27FC236}">
-                <a16:creationId xmlns:a16="http://schemas.microsoft.com/office/drawing/2014/main" id="{8A70B47C-D70E-4225-B6CC-FDD807438F18}"/>
+                <a16:creationId xmlns:a16="http://schemas.microsoft.com/office/drawing/2014/main" id="{CA091F81-A28F-4399-996F-150581AF1126}"/>
               </a:ext>
             </a:extLst>
           </p:cNvPr>
@@ -12044,7 +12350,7 @@
           <p:cNvPr id="4" name="">
             <a:extLst xmlns:a="http://schemas.openxmlformats.org/drawingml/2006/main">
               <a:ext uri="{FF2B5EF4-FFF2-40B4-BE49-F238E27FC236}">
-                <a16:creationId xmlns:a16="http://schemas.microsoft.com/office/drawing/2014/main" id="{FC316E85-67EC-4711-A919-4883BB46E20D}"/>
+                <a16:creationId xmlns:a16="http://schemas.microsoft.com/office/drawing/2014/main" id="{85D6369A-C7EB-45C1-88EE-146DF1A9D91D}"/>
               </a:ext>
             </a:extLst>
           </p:cNvPr>
@@ -12101,7 +12407,7 @@
           <p:cNvPr id="5" name="">
             <a:extLst xmlns:a="http://schemas.openxmlformats.org/drawingml/2006/main">
               <a:ext uri="{FF2B5EF4-FFF2-40B4-BE49-F238E27FC236}">
-                <a16:creationId xmlns:a16="http://schemas.microsoft.com/office/drawing/2014/main" id="{E1E9323F-96B8-4DE5-AF98-26F63823D66A}"/>
+                <a16:creationId xmlns:a16="http://schemas.microsoft.com/office/drawing/2014/main" id="{F29C5D0D-C49E-4AFA-B052-EB4979A714C9}"/>
               </a:ext>
             </a:extLst>
           </p:cNvPr>
@@ -12158,7 +12464,7 @@
           <p:cNvPr id="6" name="">
             <a:extLst xmlns:a="http://schemas.openxmlformats.org/drawingml/2006/main">
               <a:ext uri="{FF2B5EF4-FFF2-40B4-BE49-F238E27FC236}">
-                <a16:creationId xmlns:a16="http://schemas.microsoft.com/office/drawing/2014/main" id="{D6F9C58A-50FE-40C2-B542-D1A7DCF465B9}"/>
+                <a16:creationId xmlns:a16="http://schemas.microsoft.com/office/drawing/2014/main" id="{8781CA53-4B72-4521-824A-10A18FDD0B0E}"/>
               </a:ext>
             </a:extLst>
           </p:cNvPr>
@@ -12215,7 +12521,7 @@
           <p:cNvPr id="7" name="">
             <a:extLst xmlns:a="http://schemas.openxmlformats.org/drawingml/2006/main">
               <a:ext uri="{FF2B5EF4-FFF2-40B4-BE49-F238E27FC236}">
-                <a16:creationId xmlns:a16="http://schemas.microsoft.com/office/drawing/2014/main" id="{7D8B9D58-0358-4CF5-9BE7-FEC2A97545D0}"/>
+                <a16:creationId xmlns:a16="http://schemas.microsoft.com/office/drawing/2014/main" id="{B48BDE73-A7AC-4C7C-B20B-483FC25E8C79}"/>
               </a:ext>
             </a:extLst>
           </p:cNvPr>
@@ -12247,7 +12553,7 @@
           <p:cNvPr id="8" name="">
             <a:extLst xmlns:a="http://schemas.openxmlformats.org/drawingml/2006/main">
               <a:ext uri="{FF2B5EF4-FFF2-40B4-BE49-F238E27FC236}">
-                <a16:creationId xmlns:a16="http://schemas.microsoft.com/office/drawing/2014/main" id="{8DC729BE-A016-48D1-B6AE-F1DB8098A98D}"/>
+                <a16:creationId xmlns:a16="http://schemas.microsoft.com/office/drawing/2014/main" id="{5D68B10B-13B4-42A7-BAA5-EC750DD5AAA2}"/>
               </a:ext>
             </a:extLst>
           </p:cNvPr>
@@ -12304,7 +12610,7 @@
           <p:cNvPr id="9" name="">
             <a:extLst xmlns:a="http://schemas.openxmlformats.org/drawingml/2006/main">
               <a:ext uri="{FF2B5EF4-FFF2-40B4-BE49-F238E27FC236}">
-                <a16:creationId xmlns:a16="http://schemas.microsoft.com/office/drawing/2014/main" id="{3EB14347-347A-4FDD-AB9B-EEDB96AE44A6}"/>
+                <a16:creationId xmlns:a16="http://schemas.microsoft.com/office/drawing/2014/main" id="{8720275A-E7E9-4C12-B8A4-279ED57045A5}"/>
               </a:ext>
             </a:extLst>
           </p:cNvPr>
@@ -12361,7 +12667,7 @@
           <p:cNvPr id="10" name="">
             <a:extLst xmlns:a="http://schemas.openxmlformats.org/drawingml/2006/main">
               <a:ext uri="{FF2B5EF4-FFF2-40B4-BE49-F238E27FC236}">
-                <a16:creationId xmlns:a16="http://schemas.microsoft.com/office/drawing/2014/main" id="{76A5273D-AEB8-42B1-8BFB-D61E21BBEEDE}"/>
+                <a16:creationId xmlns:a16="http://schemas.microsoft.com/office/drawing/2014/main" id="{FA4D6D9E-CB84-4FC7-AFEC-A4BBD5DC6894}"/>
               </a:ext>
             </a:extLst>
           </p:cNvPr>
@@ -12395,7 +12701,7 @@
           <p:cNvPr id="11" name="">
             <a:extLst xmlns:a="http://schemas.openxmlformats.org/drawingml/2006/main">
               <a:ext uri="{FF2B5EF4-FFF2-40B4-BE49-F238E27FC236}">
-                <a16:creationId xmlns:a16="http://schemas.microsoft.com/office/drawing/2014/main" id="{35AD734F-E813-44CA-A0C2-2415AAABBD0A}"/>
+                <a16:creationId xmlns:a16="http://schemas.microsoft.com/office/drawing/2014/main" id="{11887FB9-1506-41B3-A531-0836066B05DB}"/>
               </a:ext>
             </a:extLst>
           </p:cNvPr>
@@ -12427,7 +12733,7 @@
           <p:cNvPr id="12" name="">
             <a:extLst xmlns:a="http://schemas.openxmlformats.org/drawingml/2006/main">
               <a:ext uri="{FF2B5EF4-FFF2-40B4-BE49-F238E27FC236}">
-                <a16:creationId xmlns:a16="http://schemas.microsoft.com/office/drawing/2014/main" id="{4EC5CD50-FDD8-43F8-839A-41B9E38558B7}"/>
+                <a16:creationId xmlns:a16="http://schemas.microsoft.com/office/drawing/2014/main" id="{BA0F9130-D975-4448-9BF1-89BBF32E63F4}"/>
               </a:ext>
             </a:extLst>
           </p:cNvPr>
@@ -12484,7 +12790,7 @@
           <p:cNvPr id="13" name="">
             <a:extLst xmlns:a="http://schemas.openxmlformats.org/drawingml/2006/main">
               <a:ext uri="{FF2B5EF4-FFF2-40B4-BE49-F238E27FC236}">
-                <a16:creationId xmlns:a16="http://schemas.microsoft.com/office/drawing/2014/main" id="{DA42D2EE-B43C-47ED-A354-48506E5F71B8}"/>
+                <a16:creationId xmlns:a16="http://schemas.microsoft.com/office/drawing/2014/main" id="{07CFE332-42C0-4064-BCF6-31C8CF5147D3}"/>
               </a:ext>
             </a:extLst>
           </p:cNvPr>
@@ -12541,7 +12847,7 @@
           <p:cNvPr id="14" name="">
             <a:extLst xmlns:a="http://schemas.openxmlformats.org/drawingml/2006/main">
               <a:ext uri="{FF2B5EF4-FFF2-40B4-BE49-F238E27FC236}">
-                <a16:creationId xmlns:a16="http://schemas.microsoft.com/office/drawing/2014/main" id="{744FE402-81D0-4C7D-8BE6-8B5D22E8CF90}"/>
+                <a16:creationId xmlns:a16="http://schemas.microsoft.com/office/drawing/2014/main" id="{616A1420-18DD-4BF6-BF70-E15A6D0FDF1A}"/>
               </a:ext>
             </a:extLst>
           </p:cNvPr>
@@ -12575,7 +12881,7 @@
           <p:cNvPr id="15" name="">
             <a:extLst xmlns:a="http://schemas.openxmlformats.org/drawingml/2006/main">
               <a:ext uri="{FF2B5EF4-FFF2-40B4-BE49-F238E27FC236}">
-                <a16:creationId xmlns:a16="http://schemas.microsoft.com/office/drawing/2014/main" id="{A5632908-7B80-4452-B45F-C58EBA29E549}"/>
+                <a16:creationId xmlns:a16="http://schemas.microsoft.com/office/drawing/2014/main" id="{03A9A42E-C755-4BA8-865A-7535A3820304}"/>
               </a:ext>
             </a:extLst>
           </p:cNvPr>
@@ -12607,7 +12913,7 @@
           <p:cNvPr id="16" name="">
             <a:extLst xmlns:a="http://schemas.openxmlformats.org/drawingml/2006/main">
               <a:ext uri="{FF2B5EF4-FFF2-40B4-BE49-F238E27FC236}">
-                <a16:creationId xmlns:a16="http://schemas.microsoft.com/office/drawing/2014/main" id="{1097D553-B4A0-4BC7-89B1-869A9F15965B}"/>
+                <a16:creationId xmlns:a16="http://schemas.microsoft.com/office/drawing/2014/main" id="{BA6B8CEE-1D8A-4223-9B85-95111C16996B}"/>
               </a:ext>
             </a:extLst>
           </p:cNvPr>
@@ -12664,7 +12970,7 @@
           <p:cNvPr id="17" name="">
             <a:extLst xmlns:a="http://schemas.openxmlformats.org/drawingml/2006/main">
               <a:ext uri="{FF2B5EF4-FFF2-40B4-BE49-F238E27FC236}">
-                <a16:creationId xmlns:a16="http://schemas.microsoft.com/office/drawing/2014/main" id="{E68AEEA9-D48A-450E-8ABE-EC55A5E47C20}"/>
+                <a16:creationId xmlns:a16="http://schemas.microsoft.com/office/drawing/2014/main" id="{136F54E8-FFFD-423C-9C8D-0BEFAA076BDF}"/>
               </a:ext>
             </a:extLst>
           </p:cNvPr>
@@ -12721,7 +13027,7 @@
           <p:cNvPr id="18" name="">
             <a:extLst xmlns:a="http://schemas.openxmlformats.org/drawingml/2006/main">
               <a:ext uri="{FF2B5EF4-FFF2-40B4-BE49-F238E27FC236}">
-                <a16:creationId xmlns:a16="http://schemas.microsoft.com/office/drawing/2014/main" id="{E9A89E2A-118D-470C-85E4-307DAE4D692D}"/>
+                <a16:creationId xmlns:a16="http://schemas.microsoft.com/office/drawing/2014/main" id="{E0B9F37F-7A47-4FC9-81B9-C5FEA7AF98A7}"/>
               </a:ext>
             </a:extLst>
           </p:cNvPr>
@@ -12755,7 +13061,7 @@
           <p:cNvPr id="19" name="">
             <a:extLst xmlns:a="http://schemas.openxmlformats.org/drawingml/2006/main">
               <a:ext uri="{FF2B5EF4-FFF2-40B4-BE49-F238E27FC236}">
-                <a16:creationId xmlns:a16="http://schemas.microsoft.com/office/drawing/2014/main" id="{F55D8C39-8AAC-4C56-8BA1-7719E91306F8}"/>
+                <a16:creationId xmlns:a16="http://schemas.microsoft.com/office/drawing/2014/main" id="{0E9A58B9-27CF-4B01-9D34-4BCF86A35367}"/>
               </a:ext>
             </a:extLst>
           </p:cNvPr>
@@ -12787,7 +13093,7 @@
           <p:cNvPr id="20" name="">
             <a:extLst xmlns:a="http://schemas.openxmlformats.org/drawingml/2006/main">
               <a:ext uri="{FF2B5EF4-FFF2-40B4-BE49-F238E27FC236}">
-                <a16:creationId xmlns:a16="http://schemas.microsoft.com/office/drawing/2014/main" id="{53609D60-CE8E-4CE3-9EFD-B8BFEC17457E}"/>
+                <a16:creationId xmlns:a16="http://schemas.microsoft.com/office/drawing/2014/main" id="{B3653B85-AD9E-4CE7-87C7-AAB0EF1FF05E}"/>
               </a:ext>
             </a:extLst>
           </p:cNvPr>
@@ -12844,7 +13150,7 @@
           <p:cNvPr id="21" name="">
             <a:extLst xmlns:a="http://schemas.openxmlformats.org/drawingml/2006/main">
               <a:ext uri="{FF2B5EF4-FFF2-40B4-BE49-F238E27FC236}">
-                <a16:creationId xmlns:a16="http://schemas.microsoft.com/office/drawing/2014/main" id="{AE696491-B2BB-42C2-AF22-DB66B697F2DE}"/>
+                <a16:creationId xmlns:a16="http://schemas.microsoft.com/office/drawing/2014/main" id="{05BEC6BD-7554-45E0-BA2E-185DD147140F}"/>
               </a:ext>
             </a:extLst>
           </p:cNvPr>
@@ -12901,7 +13207,7 @@
           <p:cNvPr id="22" name="">
             <a:extLst xmlns:a="http://schemas.openxmlformats.org/drawingml/2006/main">
               <a:ext uri="{FF2B5EF4-FFF2-40B4-BE49-F238E27FC236}">
-                <a16:creationId xmlns:a16="http://schemas.microsoft.com/office/drawing/2014/main" id="{AD9A9730-71D4-44ED-9F25-D71569C061CC}"/>
+                <a16:creationId xmlns:a16="http://schemas.microsoft.com/office/drawing/2014/main" id="{CD272640-6D47-4F80-9C19-5635DBB25EBC}"/>
               </a:ext>
             </a:extLst>
           </p:cNvPr>
@@ -12956,7 +13262,7 @@
     </p:spTree>
     <p:extLst>
       <p:ext uri="{BB962C8B-B14F-4D97-AF65-F5344CB8AC3E}">
-        <p14:creationId xmlns:p14="http://schemas.microsoft.com/office/powerpoint/2010/main" val="1231548639"/>
+        <p14:creationId xmlns:p14="http://schemas.microsoft.com/office/powerpoint/2010/main" val="642413839"/>
       </p:ext>
     </p:extLst>
   </p:cSld>
@@ -13157,7 +13463,7 @@
           <p:cNvPr id="22" name="">
             <a:extLst xmlns:a="http://schemas.openxmlformats.org/drawingml/2006/main">
               <a:ext uri="{FF2B5EF4-FFF2-40B4-BE49-F238E27FC236}">
-                <a16:creationId xmlns:a16="http://schemas.microsoft.com/office/drawing/2014/main" id="{D486696D-955B-42EB-947C-7C5511663F96}"/>
+                <a16:creationId xmlns:a16="http://schemas.microsoft.com/office/drawing/2014/main" id="{718BD8EB-4627-4A4C-979C-5BD2E10EBF5D}"/>
               </a:ext>
             </a:extLst>
           </p:cNvPr>
@@ -13189,7 +13495,7 @@
           <p:cNvPr id="2" name="">
             <a:extLst xmlns:a="http://schemas.openxmlformats.org/drawingml/2006/main">
               <a:ext uri="{FF2B5EF4-FFF2-40B4-BE49-F238E27FC236}">
-                <a16:creationId xmlns:a16="http://schemas.microsoft.com/office/drawing/2014/main" id="{592FDDBC-FEEE-42C4-830C-397F90542663}"/>
+                <a16:creationId xmlns:a16="http://schemas.microsoft.com/office/drawing/2014/main" id="{04A114DE-307E-4B3D-A4DC-B2E08D6EAA3A}"/>
               </a:ext>
             </a:extLst>
           </p:cNvPr>
@@ -13246,7 +13552,7 @@
           <p:cNvPr id="3" name="">
             <a:extLst xmlns:a="http://schemas.openxmlformats.org/drawingml/2006/main">
               <a:ext uri="{FF2B5EF4-FFF2-40B4-BE49-F238E27FC236}">
-                <a16:creationId xmlns:a16="http://schemas.microsoft.com/office/drawing/2014/main" id="{97DC5951-8D20-4C18-91F6-E400A5934E79}"/>
+                <a16:creationId xmlns:a16="http://schemas.microsoft.com/office/drawing/2014/main" id="{21C3A559-B22E-4F59-89A7-CE8233587520}"/>
               </a:ext>
             </a:extLst>
           </p:cNvPr>
@@ -13278,7 +13584,7 @@
           <p:cNvPr id="4" name="">
             <a:extLst xmlns:a="http://schemas.openxmlformats.org/drawingml/2006/main">
               <a:ext uri="{FF2B5EF4-FFF2-40B4-BE49-F238E27FC236}">
-                <a16:creationId xmlns:a16="http://schemas.microsoft.com/office/drawing/2014/main" id="{6C87112B-231A-4FFF-9C59-EA451C441306}"/>
+                <a16:creationId xmlns:a16="http://schemas.microsoft.com/office/drawing/2014/main" id="{D0A871C9-CFD5-42DA-A759-DEDAFC73F8DF}"/>
               </a:ext>
             </a:extLst>
           </p:cNvPr>
@@ -13335,7 +13641,7 @@
           <p:cNvPr id="5" name="">
             <a:extLst xmlns:a="http://schemas.openxmlformats.org/drawingml/2006/main">
               <a:ext uri="{FF2B5EF4-FFF2-40B4-BE49-F238E27FC236}">
-                <a16:creationId xmlns:a16="http://schemas.microsoft.com/office/drawing/2014/main" id="{59339E7C-648C-4DDD-B084-82852D20950E}"/>
+                <a16:creationId xmlns:a16="http://schemas.microsoft.com/office/drawing/2014/main" id="{340F41F0-F29D-4E92-975B-4FAEF70EC665}"/>
               </a:ext>
             </a:extLst>
           </p:cNvPr>
@@ -13392,7 +13698,7 @@
           <p:cNvPr id="6" name="">
             <a:extLst xmlns:a="http://schemas.openxmlformats.org/drawingml/2006/main">
               <a:ext uri="{FF2B5EF4-FFF2-40B4-BE49-F238E27FC236}">
-                <a16:creationId xmlns:a16="http://schemas.microsoft.com/office/drawing/2014/main" id="{38B660C1-586C-4365-ABAF-F44F65E61088}"/>
+                <a16:creationId xmlns:a16="http://schemas.microsoft.com/office/drawing/2014/main" id="{89D743DA-03CF-4E45-A803-12565217CA83}"/>
               </a:ext>
             </a:extLst>
           </p:cNvPr>
@@ -13449,7 +13755,7 @@
           <p:cNvPr id="7" name="">
             <a:extLst xmlns:a="http://schemas.openxmlformats.org/drawingml/2006/main">
               <a:ext uri="{FF2B5EF4-FFF2-40B4-BE49-F238E27FC236}">
-                <a16:creationId xmlns:a16="http://schemas.microsoft.com/office/drawing/2014/main" id="{FB565458-8FEA-448C-A1DA-97F63779CC48}"/>
+                <a16:creationId xmlns:a16="http://schemas.microsoft.com/office/drawing/2014/main" id="{6989316A-5719-4117-B820-728FA4F48994}"/>
               </a:ext>
             </a:extLst>
           </p:cNvPr>
@@ -13481,7 +13787,7 @@
           <p:cNvPr id="8" name="">
             <a:extLst xmlns:a="http://schemas.openxmlformats.org/drawingml/2006/main">
               <a:ext uri="{FF2B5EF4-FFF2-40B4-BE49-F238E27FC236}">
-                <a16:creationId xmlns:a16="http://schemas.microsoft.com/office/drawing/2014/main" id="{37EF5F7A-9F2E-4411-BCC0-B4CD24C432B4}"/>
+                <a16:creationId xmlns:a16="http://schemas.microsoft.com/office/drawing/2014/main" id="{5979155E-F014-48E0-BA40-14F9C2AE24A3}"/>
               </a:ext>
             </a:extLst>
           </p:cNvPr>
@@ -13538,7 +13844,7 @@
           <p:cNvPr id="9" name="">
             <a:extLst xmlns:a="http://schemas.openxmlformats.org/drawingml/2006/main">
               <a:ext uri="{FF2B5EF4-FFF2-40B4-BE49-F238E27FC236}">
-                <a16:creationId xmlns:a16="http://schemas.microsoft.com/office/drawing/2014/main" id="{9D0F104F-57A5-4B8D-A93E-EDBA8498CF1D}"/>
+                <a16:creationId xmlns:a16="http://schemas.microsoft.com/office/drawing/2014/main" id="{8A582C57-3F8E-4F3A-9F06-A77829FD138B}"/>
               </a:ext>
             </a:extLst>
           </p:cNvPr>
@@ -13595,7 +13901,7 @@
           <p:cNvPr id="10" name="">
             <a:extLst xmlns:a="http://schemas.openxmlformats.org/drawingml/2006/main">
               <a:ext uri="{FF2B5EF4-FFF2-40B4-BE49-F238E27FC236}">
-                <a16:creationId xmlns:a16="http://schemas.microsoft.com/office/drawing/2014/main" id="{56C591F0-BEBE-4717-9F28-107B0812F6DB}"/>
+                <a16:creationId xmlns:a16="http://schemas.microsoft.com/office/drawing/2014/main" id="{CD0E1FF7-BCF2-4DD3-8319-4DF6C8BF40C8}"/>
               </a:ext>
             </a:extLst>
           </p:cNvPr>
@@ -13629,7 +13935,7 @@
           <p:cNvPr id="11" name="">
             <a:extLst xmlns:a="http://schemas.openxmlformats.org/drawingml/2006/main">
               <a:ext uri="{FF2B5EF4-FFF2-40B4-BE49-F238E27FC236}">
-                <a16:creationId xmlns:a16="http://schemas.microsoft.com/office/drawing/2014/main" id="{C52C1593-9555-4923-BE29-21C1FC0A3E7E}"/>
+                <a16:creationId xmlns:a16="http://schemas.microsoft.com/office/drawing/2014/main" id="{49F57845-C618-41ED-BD11-36BF18C6F4B4}"/>
               </a:ext>
             </a:extLst>
           </p:cNvPr>
@@ -13661,7 +13967,7 @@
           <p:cNvPr id="12" name="">
             <a:extLst xmlns:a="http://schemas.openxmlformats.org/drawingml/2006/main">
               <a:ext uri="{FF2B5EF4-FFF2-40B4-BE49-F238E27FC236}">
-                <a16:creationId xmlns:a16="http://schemas.microsoft.com/office/drawing/2014/main" id="{82E5A626-5CE1-45EF-B039-CC68A74B943F}"/>
+                <a16:creationId xmlns:a16="http://schemas.microsoft.com/office/drawing/2014/main" id="{510C93F0-03A8-44FE-A0EB-6BC2F5A8AA13}"/>
               </a:ext>
             </a:extLst>
           </p:cNvPr>
@@ -13718,7 +14024,7 @@
           <p:cNvPr id="13" name="">
             <a:extLst xmlns:a="http://schemas.openxmlformats.org/drawingml/2006/main">
               <a:ext uri="{FF2B5EF4-FFF2-40B4-BE49-F238E27FC236}">
-                <a16:creationId xmlns:a16="http://schemas.microsoft.com/office/drawing/2014/main" id="{FC93C243-C382-4942-B2FA-823BCDA9AA07}"/>
+                <a16:creationId xmlns:a16="http://schemas.microsoft.com/office/drawing/2014/main" id="{712ABBDB-764F-4037-A5F7-C20D26A0B05A}"/>
               </a:ext>
             </a:extLst>
           </p:cNvPr>
@@ -13775,7 +14081,7 @@
           <p:cNvPr id="14" name="">
             <a:extLst xmlns:a="http://schemas.openxmlformats.org/drawingml/2006/main">
               <a:ext uri="{FF2B5EF4-FFF2-40B4-BE49-F238E27FC236}">
-                <a16:creationId xmlns:a16="http://schemas.microsoft.com/office/drawing/2014/main" id="{0B936DCF-E391-4F11-9710-12F99F1D3FEC}"/>
+                <a16:creationId xmlns:a16="http://schemas.microsoft.com/office/drawing/2014/main" id="{284441DB-8832-4EEE-9AF7-6AEE6A19D123}"/>
               </a:ext>
             </a:extLst>
           </p:cNvPr>
@@ -13809,7 +14115,7 @@
           <p:cNvPr id="15" name="">
             <a:extLst xmlns:a="http://schemas.openxmlformats.org/drawingml/2006/main">
               <a:ext uri="{FF2B5EF4-FFF2-40B4-BE49-F238E27FC236}">
-                <a16:creationId xmlns:a16="http://schemas.microsoft.com/office/drawing/2014/main" id="{59FF18BE-648D-4F16-A193-4E43190813FB}"/>
+                <a16:creationId xmlns:a16="http://schemas.microsoft.com/office/drawing/2014/main" id="{6F91F274-7A28-41C4-BFAE-F40A65F6554E}"/>
               </a:ext>
             </a:extLst>
           </p:cNvPr>
@@ -13841,7 +14147,7 @@
           <p:cNvPr id="16" name="">
             <a:extLst xmlns:a="http://schemas.openxmlformats.org/drawingml/2006/main">
               <a:ext uri="{FF2B5EF4-FFF2-40B4-BE49-F238E27FC236}">
-                <a16:creationId xmlns:a16="http://schemas.microsoft.com/office/drawing/2014/main" id="{5BBABDAA-BD4A-4E55-80D2-BE93D188725B}"/>
+                <a16:creationId xmlns:a16="http://schemas.microsoft.com/office/drawing/2014/main" id="{B51B949B-3BD1-4672-97DB-1FADE51BD608}"/>
               </a:ext>
             </a:extLst>
           </p:cNvPr>
@@ -13898,7 +14204,7 @@
           <p:cNvPr id="17" name="">
             <a:extLst xmlns:a="http://schemas.openxmlformats.org/drawingml/2006/main">
               <a:ext uri="{FF2B5EF4-FFF2-40B4-BE49-F238E27FC236}">
-                <a16:creationId xmlns:a16="http://schemas.microsoft.com/office/drawing/2014/main" id="{4CD81ECC-2457-4617-AF30-D8A73E395F69}"/>
+                <a16:creationId xmlns:a16="http://schemas.microsoft.com/office/drawing/2014/main" id="{8AC9910B-6F5D-48F6-B6FB-16F3543BFEE7}"/>
               </a:ext>
             </a:extLst>
           </p:cNvPr>
@@ -13955,7 +14261,7 @@
           <p:cNvPr id="18" name="">
             <a:extLst xmlns:a="http://schemas.openxmlformats.org/drawingml/2006/main">
               <a:ext uri="{FF2B5EF4-FFF2-40B4-BE49-F238E27FC236}">
-                <a16:creationId xmlns:a16="http://schemas.microsoft.com/office/drawing/2014/main" id="{E55DD384-F42F-465C-A5F2-8F3FA7527A26}"/>
+                <a16:creationId xmlns:a16="http://schemas.microsoft.com/office/drawing/2014/main" id="{5E19CE96-A2D8-464E-A0E4-CA17685195E5}"/>
               </a:ext>
             </a:extLst>
           </p:cNvPr>
@@ -13989,7 +14295,7 @@
           <p:cNvPr id="19" name="">
             <a:extLst xmlns:a="http://schemas.openxmlformats.org/drawingml/2006/main">
               <a:ext uri="{FF2B5EF4-FFF2-40B4-BE49-F238E27FC236}">
-                <a16:creationId xmlns:a16="http://schemas.microsoft.com/office/drawing/2014/main" id="{B4854765-1F8C-4B7A-AFDE-7062CDB943EC}"/>
+                <a16:creationId xmlns:a16="http://schemas.microsoft.com/office/drawing/2014/main" id="{5DF34D01-106C-44D8-B42C-B8F30BC92D5C}"/>
               </a:ext>
             </a:extLst>
           </p:cNvPr>
@@ -14021,7 +14327,7 @@
           <p:cNvPr id="20" name="">
             <a:extLst xmlns:a="http://schemas.openxmlformats.org/drawingml/2006/main">
               <a:ext uri="{FF2B5EF4-FFF2-40B4-BE49-F238E27FC236}">
-                <a16:creationId xmlns:a16="http://schemas.microsoft.com/office/drawing/2014/main" id="{7657CFFC-BBAD-40F2-AADA-D9C4D6863E24}"/>
+                <a16:creationId xmlns:a16="http://schemas.microsoft.com/office/drawing/2014/main" id="{13AD3171-9820-49FF-978A-2705837D33C7}"/>
               </a:ext>
             </a:extLst>
           </p:cNvPr>
@@ -14078,7 +14384,7 @@
           <p:cNvPr id="21" name="">
             <a:extLst xmlns:a="http://schemas.openxmlformats.org/drawingml/2006/main">
               <a:ext uri="{FF2B5EF4-FFF2-40B4-BE49-F238E27FC236}">
-                <a16:creationId xmlns:a16="http://schemas.microsoft.com/office/drawing/2014/main" id="{585C3AE9-67F2-4804-A44A-CA99E585060F}"/>
+                <a16:creationId xmlns:a16="http://schemas.microsoft.com/office/drawing/2014/main" id="{01741686-AF90-47BA-BA8B-1116759A1A45}"/>
               </a:ext>
             </a:extLst>
           </p:cNvPr>
@@ -14133,7 +14439,7 @@
     </p:spTree>
     <p:extLst>
       <p:ext uri="{BB962C8B-B14F-4D97-AF65-F5344CB8AC3E}">
-        <p14:creationId xmlns:p14="http://schemas.microsoft.com/office/powerpoint/2010/main" val="1095315998"/>
+        <p14:creationId xmlns:p14="http://schemas.microsoft.com/office/powerpoint/2010/main" val="389102827"/>
       </p:ext>
     </p:extLst>
   </p:cSld>
